--- a/public/lessons/year-6-maths/autumn/week-4/estimate-quotients-using-multiples/teaching-powerpoint-v1.pptx
+++ b/public/lessons/year-6-maths/autumn/week-4/estimate-quotients-using-multiples/teaching-powerpoint-v1.pptx
@@ -2,24 +2,24 @@
 <file path=ppt/presentation.xml><?xml version="1.0" encoding="utf-8"?>
 <p:presentation xmlns:p="http://schemas.openxmlformats.org/presentationml/2006/main">
   <p:sldMasterIdLst>
-    <p:sldMasterId xmlns:r="http://schemas.openxmlformats.org/officeDocument/2006/relationships" id="2147483648" r:id="R240be59565c54b6d"/>
+    <p:sldMasterId xmlns:r="http://schemas.openxmlformats.org/officeDocument/2006/relationships" id="2147483648" r:id="R1e6947b8a1614d3a"/>
   </p:sldMasterIdLst>
   <p:notesMasterIdLst>
-    <p:notesMasterId xmlns:r="http://schemas.openxmlformats.org/officeDocument/2006/relationships" r:id="R75813d0f214c46de"/>
+    <p:notesMasterId xmlns:r="http://schemas.openxmlformats.org/officeDocument/2006/relationships" r:id="R1ff181fd827a4148"/>
   </p:notesMasterIdLst>
   <p:sldIdLst>
-    <p:sldId xmlns:r="http://schemas.openxmlformats.org/officeDocument/2006/relationships" id="256" r:id="Rbb0aa7195e7b48f3"/>
-    <p:sldId xmlns:r="http://schemas.openxmlformats.org/officeDocument/2006/relationships" id="257" r:id="R68d9475a18644993"/>
-    <p:sldId xmlns:r="http://schemas.openxmlformats.org/officeDocument/2006/relationships" id="258" r:id="R8cf19e29108a4fd3"/>
-    <p:sldId xmlns:r="http://schemas.openxmlformats.org/officeDocument/2006/relationships" id="259" r:id="R8e8b64aace3d490d"/>
-    <p:sldId xmlns:r="http://schemas.openxmlformats.org/officeDocument/2006/relationships" id="260" r:id="R222f935191d44629"/>
-    <p:sldId xmlns:r="http://schemas.openxmlformats.org/officeDocument/2006/relationships" id="261" r:id="R90a88e4e983e4ad2"/>
-    <p:sldId xmlns:r="http://schemas.openxmlformats.org/officeDocument/2006/relationships" id="262" r:id="R2d25e203b5164adf"/>
-    <p:sldId xmlns:r="http://schemas.openxmlformats.org/officeDocument/2006/relationships" id="263" r:id="Rffe02042b2134a6f"/>
-    <p:sldId xmlns:r="http://schemas.openxmlformats.org/officeDocument/2006/relationships" id="264" r:id="Reb4aee7a5a2c4e13"/>
-    <p:sldId xmlns:r="http://schemas.openxmlformats.org/officeDocument/2006/relationships" id="265" r:id="R48e700d2497c48c3"/>
-    <p:sldId xmlns:r="http://schemas.openxmlformats.org/officeDocument/2006/relationships" id="266" r:id="R8d29c8dba1f844a7"/>
-    <p:sldId xmlns:r="http://schemas.openxmlformats.org/officeDocument/2006/relationships" id="267" r:id="R067e9094bfa0422a"/>
+    <p:sldId xmlns:r="http://schemas.openxmlformats.org/officeDocument/2006/relationships" id="256" r:id="R1f78966ae5164169"/>
+    <p:sldId xmlns:r="http://schemas.openxmlformats.org/officeDocument/2006/relationships" id="257" r:id="Rce25a0def4804d46"/>
+    <p:sldId xmlns:r="http://schemas.openxmlformats.org/officeDocument/2006/relationships" id="258" r:id="R7e5599857d2c4038"/>
+    <p:sldId xmlns:r="http://schemas.openxmlformats.org/officeDocument/2006/relationships" id="259" r:id="R8401bbc5d6b84b08"/>
+    <p:sldId xmlns:r="http://schemas.openxmlformats.org/officeDocument/2006/relationships" id="260" r:id="R05104638ab484cfc"/>
+    <p:sldId xmlns:r="http://schemas.openxmlformats.org/officeDocument/2006/relationships" id="261" r:id="Ra7eda201d5fe4264"/>
+    <p:sldId xmlns:r="http://schemas.openxmlformats.org/officeDocument/2006/relationships" id="262" r:id="R216d4276949b4e14"/>
+    <p:sldId xmlns:r="http://schemas.openxmlformats.org/officeDocument/2006/relationships" id="263" r:id="R350c5ad19fd64769"/>
+    <p:sldId xmlns:r="http://schemas.openxmlformats.org/officeDocument/2006/relationships" id="264" r:id="R1466908fbf2d4999"/>
+    <p:sldId xmlns:r="http://schemas.openxmlformats.org/officeDocument/2006/relationships" id="265" r:id="R86011b81c8f34ac4"/>
+    <p:sldId xmlns:r="http://schemas.openxmlformats.org/officeDocument/2006/relationships" id="266" r:id="R6d1a8a6ca6684403"/>
+    <p:sldId xmlns:r="http://schemas.openxmlformats.org/officeDocument/2006/relationships" id="267" r:id="Re26248fa97504935"/>
   </p:sldIdLst>
   <p:sldSz cx="12192000" cy="6858000"/>
   <p:notesSz cx="6858000" cy="9144000"/>
@@ -873,7 +873,7 @@
           <a:lstStyle xmlns:a="http://schemas.openxmlformats.org/drawingml/2006/main"/>
           <a:p xmlns:a="http://schemas.openxmlformats.org/drawingml/2006/main">
             <a:r>
-              <a:t>I do. Reveal the question, setup and each calculation stage one click at a time. Pupils watch before copying. Model answer: About 300; exactly 308.</a:t>
+              <a:t>I do. Reveal the question, then reveal each mathematical change one click at a time. Point to the numbers and operation that changed before moving to the next line. Final answer: About 300; exactly 308.</a:t>
             </a:r>
           </a:p>
         </p:txBody>
@@ -1291,7 +1291,7 @@
   </p:cSld>
   <p:clrMap bg1="lt1" tx1="dk1" bg2="lt2" tx2="dk2" accent1="accent1" accent2="accent2" accent3="accent3" accent4="accent4" accent5="accent5" accent6="accent6" hlink="hlink" folHlink="folHlink"/>
   <p:sldLayoutIdLst>
-    <p:sldLayoutId xmlns:r="http://schemas.openxmlformats.org/officeDocument/2006/relationships" id="2147483649" r:id="Rbc35cd19eb9b4839"/>
+    <p:sldLayoutId xmlns:r="http://schemas.openxmlformats.org/officeDocument/2006/relationships" id="2147483649" r:id="R608fb7e299954763"/>
   </p:sldLayoutIdLst>
   <p:txStyles>
     <p:titleStyle>
@@ -1842,7 +1842,7 @@
           <p:cNvPr id="12" name="">
             <a:extLst xmlns:a="http://schemas.openxmlformats.org/drawingml/2006/main">
               <a:ext uri="{FF2B5EF4-FFF2-40B4-BE49-F238E27FC236}">
-                <a16:creationId xmlns:a16="http://schemas.microsoft.com/office/drawing/2014/main" id="{1734A6A7-1B13-4EF4-928C-4CEC5A149A18}"/>
+                <a16:creationId xmlns:a16="http://schemas.microsoft.com/office/drawing/2014/main" id="{E91A19EC-FBF3-4895-9F0B-A2785927C9BA}"/>
               </a:ext>
             </a:extLst>
           </p:cNvPr>
@@ -1874,7 +1874,7 @@
           <p:cNvPr id="2" name="">
             <a:extLst xmlns:a="http://schemas.openxmlformats.org/drawingml/2006/main">
               <a:ext uri="{FF2B5EF4-FFF2-40B4-BE49-F238E27FC236}">
-                <a16:creationId xmlns:a16="http://schemas.microsoft.com/office/drawing/2014/main" id="{500F39B8-E57F-47F8-A910-E9956F749F00}"/>
+                <a16:creationId xmlns:a16="http://schemas.microsoft.com/office/drawing/2014/main" id="{7F727995-F896-44A3-ACAD-9517CA54F64D}"/>
               </a:ext>
             </a:extLst>
           </p:cNvPr>
@@ -1931,7 +1931,7 @@
           <p:cNvPr id="3" name="">
             <a:extLst xmlns:a="http://schemas.openxmlformats.org/drawingml/2006/main">
               <a:ext uri="{FF2B5EF4-FFF2-40B4-BE49-F238E27FC236}">
-                <a16:creationId xmlns:a16="http://schemas.microsoft.com/office/drawing/2014/main" id="{793035C3-AE9C-450D-9AFE-C17A202D39B0}"/>
+                <a16:creationId xmlns:a16="http://schemas.microsoft.com/office/drawing/2014/main" id="{0DBCE173-43E0-4B1F-86A4-CD969985F6F1}"/>
               </a:ext>
             </a:extLst>
           </p:cNvPr>
@@ -1965,7 +1965,7 @@
           <p:cNvPr id="4" name="">
             <a:extLst xmlns:a="http://schemas.openxmlformats.org/drawingml/2006/main">
               <a:ext uri="{FF2B5EF4-FFF2-40B4-BE49-F238E27FC236}">
-                <a16:creationId xmlns:a16="http://schemas.microsoft.com/office/drawing/2014/main" id="{6B272768-8887-4B96-87FD-9535457D4E56}"/>
+                <a16:creationId xmlns:a16="http://schemas.microsoft.com/office/drawing/2014/main" id="{A68228C5-6FC9-4270-9484-62FCC14664C4}"/>
               </a:ext>
             </a:extLst>
           </p:cNvPr>
@@ -2022,7 +2022,7 @@
           <p:cNvPr id="5" name="">
             <a:extLst xmlns:a="http://schemas.openxmlformats.org/drawingml/2006/main">
               <a:ext uri="{FF2B5EF4-FFF2-40B4-BE49-F238E27FC236}">
-                <a16:creationId xmlns:a16="http://schemas.microsoft.com/office/drawing/2014/main" id="{38FDBD70-2C68-4AC3-BEA7-9F542F751DBA}"/>
+                <a16:creationId xmlns:a16="http://schemas.microsoft.com/office/drawing/2014/main" id="{EDB83FBE-7605-4DBC-BE6A-984192585D92}"/>
               </a:ext>
             </a:extLst>
           </p:cNvPr>
@@ -2079,7 +2079,7 @@
           <p:cNvPr id="6" name="">
             <a:extLst xmlns:a="http://schemas.openxmlformats.org/drawingml/2006/main">
               <a:ext uri="{FF2B5EF4-FFF2-40B4-BE49-F238E27FC236}">
-                <a16:creationId xmlns:a16="http://schemas.microsoft.com/office/drawing/2014/main" id="{8A32D82A-8BA0-4CAD-B14B-BDD1CDD07ECC}"/>
+                <a16:creationId xmlns:a16="http://schemas.microsoft.com/office/drawing/2014/main" id="{1DF56473-727E-45B5-AC44-4F3987023DC1}"/>
               </a:ext>
             </a:extLst>
           </p:cNvPr>
@@ -2113,7 +2113,7 @@
           <p:cNvPr id="7" name="">
             <a:extLst xmlns:a="http://schemas.openxmlformats.org/drawingml/2006/main">
               <a:ext uri="{FF2B5EF4-FFF2-40B4-BE49-F238E27FC236}">
-                <a16:creationId xmlns:a16="http://schemas.microsoft.com/office/drawing/2014/main" id="{C4C5AD45-BE64-4EE2-8F27-75BAB2FFA256}"/>
+                <a16:creationId xmlns:a16="http://schemas.microsoft.com/office/drawing/2014/main" id="{AB5E2B8C-B5A9-4F28-BDA1-E165B9A5983E}"/>
               </a:ext>
             </a:extLst>
           </p:cNvPr>
@@ -2170,7 +2170,7 @@
           <p:cNvPr id="8" name="">
             <a:extLst xmlns:a="http://schemas.openxmlformats.org/drawingml/2006/main">
               <a:ext uri="{FF2B5EF4-FFF2-40B4-BE49-F238E27FC236}">
-                <a16:creationId xmlns:a16="http://schemas.microsoft.com/office/drawing/2014/main" id="{AFBF3D27-A3DB-46C5-A815-6570BEA05374}"/>
+                <a16:creationId xmlns:a16="http://schemas.microsoft.com/office/drawing/2014/main" id="{FC8F8940-95C9-468A-867C-E30C6C8A0337}"/>
               </a:ext>
             </a:extLst>
           </p:cNvPr>
@@ -2227,7 +2227,7 @@
           <p:cNvPr id="9" name="">
             <a:extLst xmlns:a="http://schemas.openxmlformats.org/drawingml/2006/main">
               <a:ext uri="{FF2B5EF4-FFF2-40B4-BE49-F238E27FC236}">
-                <a16:creationId xmlns:a16="http://schemas.microsoft.com/office/drawing/2014/main" id="{69BDF744-E1C7-4DA1-984E-13FA4598DEA5}"/>
+                <a16:creationId xmlns:a16="http://schemas.microsoft.com/office/drawing/2014/main" id="{1A4F931D-7A2A-4D10-B04B-362B45EE5D02}"/>
               </a:ext>
             </a:extLst>
           </p:cNvPr>
@@ -2284,7 +2284,7 @@
           <p:cNvPr id="10" name="">
             <a:extLst xmlns:a="http://schemas.openxmlformats.org/drawingml/2006/main">
               <a:ext uri="{FF2B5EF4-FFF2-40B4-BE49-F238E27FC236}">
-                <a16:creationId xmlns:a16="http://schemas.microsoft.com/office/drawing/2014/main" id="{446EE6A5-300E-45E4-A142-D3D0618C86A3}"/>
+                <a16:creationId xmlns:a16="http://schemas.microsoft.com/office/drawing/2014/main" id="{D7222E32-9B6E-4EED-BB31-133EA2620560}"/>
               </a:ext>
             </a:extLst>
           </p:cNvPr>
@@ -2341,7 +2341,7 @@
           <p:cNvPr id="11" name="">
             <a:extLst xmlns:a="http://schemas.openxmlformats.org/drawingml/2006/main">
               <a:ext uri="{FF2B5EF4-FFF2-40B4-BE49-F238E27FC236}">
-                <a16:creationId xmlns:a16="http://schemas.microsoft.com/office/drawing/2014/main" id="{39725378-EEEA-4760-A090-E059D011240D}"/>
+                <a16:creationId xmlns:a16="http://schemas.microsoft.com/office/drawing/2014/main" id="{F2644E3C-556E-408B-A2AA-8153CCFF79B8}"/>
               </a:ext>
             </a:extLst>
           </p:cNvPr>
@@ -2396,7 +2396,7 @@
     </p:spTree>
     <p:extLst>
       <p:ext uri="{BB962C8B-B14F-4D97-AF65-F5344CB8AC3E}">
-        <p14:creationId xmlns:p14="http://schemas.microsoft.com/office/powerpoint/2010/main" val="1133100815"/>
+        <p14:creationId xmlns:p14="http://schemas.microsoft.com/office/powerpoint/2010/main" val="1539162650"/>
       </p:ext>
     </p:extLst>
   </p:cSld>
@@ -2427,7 +2427,7 @@
           <p:cNvPr id="14" name="">
             <a:extLst xmlns:a="http://schemas.openxmlformats.org/drawingml/2006/main">
               <a:ext uri="{FF2B5EF4-FFF2-40B4-BE49-F238E27FC236}">
-                <a16:creationId xmlns:a16="http://schemas.microsoft.com/office/drawing/2014/main" id="{69179799-99B7-4790-8C29-4960234F8FE2}"/>
+                <a16:creationId xmlns:a16="http://schemas.microsoft.com/office/drawing/2014/main" id="{8295A5D5-3AD9-43EC-B78E-8579CB924E2D}"/>
               </a:ext>
             </a:extLst>
           </p:cNvPr>
@@ -2459,7 +2459,7 @@
           <p:cNvPr id="2" name="">
             <a:extLst xmlns:a="http://schemas.openxmlformats.org/drawingml/2006/main">
               <a:ext uri="{FF2B5EF4-FFF2-40B4-BE49-F238E27FC236}">
-                <a16:creationId xmlns:a16="http://schemas.microsoft.com/office/drawing/2014/main" id="{D3A25BE5-FEB5-438F-BC3D-7CF9616B7E9D}"/>
+                <a16:creationId xmlns:a16="http://schemas.microsoft.com/office/drawing/2014/main" id="{840585C8-D7A3-4DE2-8E48-3018F9FD3457}"/>
               </a:ext>
             </a:extLst>
           </p:cNvPr>
@@ -2516,7 +2516,7 @@
           <p:cNvPr id="3" name="">
             <a:extLst xmlns:a="http://schemas.openxmlformats.org/drawingml/2006/main">
               <a:ext uri="{FF2B5EF4-FFF2-40B4-BE49-F238E27FC236}">
-                <a16:creationId xmlns:a16="http://schemas.microsoft.com/office/drawing/2014/main" id="{FA39CEE0-B024-43B5-B914-DCA73FDE33E3}"/>
+                <a16:creationId xmlns:a16="http://schemas.microsoft.com/office/drawing/2014/main" id="{D34995DB-41F7-4083-9194-9838D5FEF4D6}"/>
               </a:ext>
             </a:extLst>
           </p:cNvPr>
@@ -2548,7 +2548,7 @@
           <p:cNvPr id="4" name="">
             <a:extLst xmlns:a="http://schemas.openxmlformats.org/drawingml/2006/main">
               <a:ext uri="{FF2B5EF4-FFF2-40B4-BE49-F238E27FC236}">
-                <a16:creationId xmlns:a16="http://schemas.microsoft.com/office/drawing/2014/main" id="{B717FB66-69B1-481C-94AD-0899C09C699F}"/>
+                <a16:creationId xmlns:a16="http://schemas.microsoft.com/office/drawing/2014/main" id="{BA7B01C9-6FC1-4D50-9C29-9BDF096AD531}"/>
               </a:ext>
             </a:extLst>
           </p:cNvPr>
@@ -2605,7 +2605,7 @@
           <p:cNvPr id="5" name="">
             <a:extLst xmlns:a="http://schemas.openxmlformats.org/drawingml/2006/main">
               <a:ext uri="{FF2B5EF4-FFF2-40B4-BE49-F238E27FC236}">
-                <a16:creationId xmlns:a16="http://schemas.microsoft.com/office/drawing/2014/main" id="{612DC334-6748-4C4E-84F7-85E073E70DE3}"/>
+                <a16:creationId xmlns:a16="http://schemas.microsoft.com/office/drawing/2014/main" id="{DC251D3C-FDA4-4527-86BA-A95EE8F1E95A}"/>
               </a:ext>
             </a:extLst>
           </p:cNvPr>
@@ -2662,7 +2662,7 @@
           <p:cNvPr id="6" name="">
             <a:extLst xmlns:a="http://schemas.openxmlformats.org/drawingml/2006/main">
               <a:ext uri="{FF2B5EF4-FFF2-40B4-BE49-F238E27FC236}">
-                <a16:creationId xmlns:a16="http://schemas.microsoft.com/office/drawing/2014/main" id="{D2DDFE52-B1B6-46C6-95CC-F750C86E9A04}"/>
+                <a16:creationId xmlns:a16="http://schemas.microsoft.com/office/drawing/2014/main" id="{27971740-A4DF-4FEF-AA90-EED8CEF83A1C}"/>
               </a:ext>
             </a:extLst>
           </p:cNvPr>
@@ -2719,7 +2719,7 @@
           <p:cNvPr id="7" name="">
             <a:extLst xmlns:a="http://schemas.openxmlformats.org/drawingml/2006/main">
               <a:ext uri="{FF2B5EF4-FFF2-40B4-BE49-F238E27FC236}">
-                <a16:creationId xmlns:a16="http://schemas.microsoft.com/office/drawing/2014/main" id="{14365897-C37A-4003-8547-A75DD9FB15CC}"/>
+                <a16:creationId xmlns:a16="http://schemas.microsoft.com/office/drawing/2014/main" id="{E545E45C-1102-4EAA-90BF-9DA77861AE58}"/>
               </a:ext>
             </a:extLst>
           </p:cNvPr>
@@ -2751,7 +2751,7 @@
           <p:cNvPr id="8" name="">
             <a:extLst xmlns:a="http://schemas.openxmlformats.org/drawingml/2006/main">
               <a:ext uri="{FF2B5EF4-FFF2-40B4-BE49-F238E27FC236}">
-                <a16:creationId xmlns:a16="http://schemas.microsoft.com/office/drawing/2014/main" id="{8D97619B-5FB5-4D41-AA15-9629C2EDAA79}"/>
+                <a16:creationId xmlns:a16="http://schemas.microsoft.com/office/drawing/2014/main" id="{C0298F25-1D67-4987-AD32-A4183ACD2E97}"/>
               </a:ext>
             </a:extLst>
           </p:cNvPr>
@@ -2808,7 +2808,7 @@
           <p:cNvPr id="9" name="">
             <a:extLst xmlns:a="http://schemas.openxmlformats.org/drawingml/2006/main">
               <a:ext uri="{FF2B5EF4-FFF2-40B4-BE49-F238E27FC236}">
-                <a16:creationId xmlns:a16="http://schemas.microsoft.com/office/drawing/2014/main" id="{F5B4F249-7D19-40F5-8FEE-33D80226849B}"/>
+                <a16:creationId xmlns:a16="http://schemas.microsoft.com/office/drawing/2014/main" id="{A1EF218D-A3B8-4B8A-9169-8C93FA5DAD4E}"/>
               </a:ext>
             </a:extLst>
           </p:cNvPr>
@@ -2865,7 +2865,7 @@
           <p:cNvPr id="10" name="">
             <a:extLst xmlns:a="http://schemas.openxmlformats.org/drawingml/2006/main">
               <a:ext uri="{FF2B5EF4-FFF2-40B4-BE49-F238E27FC236}">
-                <a16:creationId xmlns:a16="http://schemas.microsoft.com/office/drawing/2014/main" id="{207B5BEA-7BE7-4F38-BCA8-347BCD17391D}"/>
+                <a16:creationId xmlns:a16="http://schemas.microsoft.com/office/drawing/2014/main" id="{12ABE50A-BC33-4BDD-BB38-E007D03615F5}"/>
               </a:ext>
             </a:extLst>
           </p:cNvPr>
@@ -2922,7 +2922,7 @@
           <p:cNvPr id="11" name="">
             <a:extLst xmlns:a="http://schemas.openxmlformats.org/drawingml/2006/main">
               <a:ext uri="{FF2B5EF4-FFF2-40B4-BE49-F238E27FC236}">
-                <a16:creationId xmlns:a16="http://schemas.microsoft.com/office/drawing/2014/main" id="{0BBB5119-E67D-446A-9152-386F18CFA0EE}"/>
+                <a16:creationId xmlns:a16="http://schemas.microsoft.com/office/drawing/2014/main" id="{1C4C7A5B-4B86-4978-92B8-14DBD503FE03}"/>
               </a:ext>
             </a:extLst>
           </p:cNvPr>
@@ -2979,7 +2979,7 @@
           <p:cNvPr id="12" name="">
             <a:extLst xmlns:a="http://schemas.openxmlformats.org/drawingml/2006/main">
               <a:ext uri="{FF2B5EF4-FFF2-40B4-BE49-F238E27FC236}">
-                <a16:creationId xmlns:a16="http://schemas.microsoft.com/office/drawing/2014/main" id="{BFA06C00-2579-4D27-91B3-D3703880E0A4}"/>
+                <a16:creationId xmlns:a16="http://schemas.microsoft.com/office/drawing/2014/main" id="{D8FB91F6-6F25-44C9-B065-F1F1F3E5C08C}"/>
               </a:ext>
             </a:extLst>
           </p:cNvPr>
@@ -3036,7 +3036,7 @@
           <p:cNvPr id="13" name="">
             <a:extLst xmlns:a="http://schemas.openxmlformats.org/drawingml/2006/main">
               <a:ext uri="{FF2B5EF4-FFF2-40B4-BE49-F238E27FC236}">
-                <a16:creationId xmlns:a16="http://schemas.microsoft.com/office/drawing/2014/main" id="{85F27B7E-751B-4B5E-A842-DF897552FFA8}"/>
+                <a16:creationId xmlns:a16="http://schemas.microsoft.com/office/drawing/2014/main" id="{7038BD8E-AFB3-4DD4-AF80-D46295849D08}"/>
               </a:ext>
             </a:extLst>
           </p:cNvPr>
@@ -3091,7 +3091,7 @@
     </p:spTree>
     <p:extLst>
       <p:ext uri="{BB962C8B-B14F-4D97-AF65-F5344CB8AC3E}">
-        <p14:creationId xmlns:p14="http://schemas.microsoft.com/office/powerpoint/2010/main" val="458381311"/>
+        <p14:creationId xmlns:p14="http://schemas.microsoft.com/office/powerpoint/2010/main" val="2088631718"/>
       </p:ext>
     </p:extLst>
   </p:cSld>
@@ -3292,7 +3292,7 @@
           <p:cNvPr id="19" name="">
             <a:extLst xmlns:a="http://schemas.openxmlformats.org/drawingml/2006/main">
               <a:ext uri="{FF2B5EF4-FFF2-40B4-BE49-F238E27FC236}">
-                <a16:creationId xmlns:a16="http://schemas.microsoft.com/office/drawing/2014/main" id="{90772ECF-96D3-43FF-AF1D-6276B922BE3A}"/>
+                <a16:creationId xmlns:a16="http://schemas.microsoft.com/office/drawing/2014/main" id="{D282A3F3-D20E-4D50-866A-FD09D2244B3F}"/>
               </a:ext>
             </a:extLst>
           </p:cNvPr>
@@ -3324,7 +3324,7 @@
           <p:cNvPr id="2" name="">
             <a:extLst xmlns:a="http://schemas.openxmlformats.org/drawingml/2006/main">
               <a:ext uri="{FF2B5EF4-FFF2-40B4-BE49-F238E27FC236}">
-                <a16:creationId xmlns:a16="http://schemas.microsoft.com/office/drawing/2014/main" id="{78D86993-FD34-48ED-99D3-FC7B4433DA2C}"/>
+                <a16:creationId xmlns:a16="http://schemas.microsoft.com/office/drawing/2014/main" id="{B7807F60-1FE9-45C9-97B3-811F3720DB92}"/>
               </a:ext>
             </a:extLst>
           </p:cNvPr>
@@ -3381,7 +3381,7 @@
           <p:cNvPr id="3" name="">
             <a:extLst xmlns:a="http://schemas.openxmlformats.org/drawingml/2006/main">
               <a:ext uri="{FF2B5EF4-FFF2-40B4-BE49-F238E27FC236}">
-                <a16:creationId xmlns:a16="http://schemas.microsoft.com/office/drawing/2014/main" id="{1B1F4D52-ADEE-47A4-A290-ED7586501911}"/>
+                <a16:creationId xmlns:a16="http://schemas.microsoft.com/office/drawing/2014/main" id="{190DBFBF-46E0-44D8-86B5-C6C0C7E29D68}"/>
               </a:ext>
             </a:extLst>
           </p:cNvPr>
@@ -3413,7 +3413,7 @@
           <p:cNvPr id="4" name="">
             <a:extLst xmlns:a="http://schemas.openxmlformats.org/drawingml/2006/main">
               <a:ext uri="{FF2B5EF4-FFF2-40B4-BE49-F238E27FC236}">
-                <a16:creationId xmlns:a16="http://schemas.microsoft.com/office/drawing/2014/main" id="{7A8BF07F-DACD-43BD-A288-1116A2C560E6}"/>
+                <a16:creationId xmlns:a16="http://schemas.microsoft.com/office/drawing/2014/main" id="{25C764D8-8BDA-4527-83ED-2A494764683F}"/>
               </a:ext>
             </a:extLst>
           </p:cNvPr>
@@ -3470,7 +3470,7 @@
           <p:cNvPr id="5" name="">
             <a:extLst xmlns:a="http://schemas.openxmlformats.org/drawingml/2006/main">
               <a:ext uri="{FF2B5EF4-FFF2-40B4-BE49-F238E27FC236}">
-                <a16:creationId xmlns:a16="http://schemas.microsoft.com/office/drawing/2014/main" id="{904E9512-321E-4408-B329-863E458BB484}"/>
+                <a16:creationId xmlns:a16="http://schemas.microsoft.com/office/drawing/2014/main" id="{66C2197E-64DD-4889-BB4D-13E93A9668A0}"/>
               </a:ext>
             </a:extLst>
           </p:cNvPr>
@@ -3527,7 +3527,7 @@
           <p:cNvPr id="6" name="">
             <a:extLst xmlns:a="http://schemas.openxmlformats.org/drawingml/2006/main">
               <a:ext uri="{FF2B5EF4-FFF2-40B4-BE49-F238E27FC236}">
-                <a16:creationId xmlns:a16="http://schemas.microsoft.com/office/drawing/2014/main" id="{FB90D3EB-4CC4-4DF4-BC43-8BD450FE582B}"/>
+                <a16:creationId xmlns:a16="http://schemas.microsoft.com/office/drawing/2014/main" id="{2789655C-6330-4014-BA04-37802795293C}"/>
               </a:ext>
             </a:extLst>
           </p:cNvPr>
@@ -3584,7 +3584,7 @@
           <p:cNvPr id="7" name="">
             <a:extLst xmlns:a="http://schemas.openxmlformats.org/drawingml/2006/main">
               <a:ext uri="{FF2B5EF4-FFF2-40B4-BE49-F238E27FC236}">
-                <a16:creationId xmlns:a16="http://schemas.microsoft.com/office/drawing/2014/main" id="{0111812F-2C1F-425A-9A87-0A9FB43EDEB5}"/>
+                <a16:creationId xmlns:a16="http://schemas.microsoft.com/office/drawing/2014/main" id="{57F46B19-D764-418F-9F78-D951E3930988}"/>
               </a:ext>
             </a:extLst>
           </p:cNvPr>
@@ -3616,7 +3616,7 @@
           <p:cNvPr id="8" name="">
             <a:extLst xmlns:a="http://schemas.openxmlformats.org/drawingml/2006/main">
               <a:ext uri="{FF2B5EF4-FFF2-40B4-BE49-F238E27FC236}">
-                <a16:creationId xmlns:a16="http://schemas.microsoft.com/office/drawing/2014/main" id="{D5FACDF1-F2EA-4DF7-9294-D66B071EF650}"/>
+                <a16:creationId xmlns:a16="http://schemas.microsoft.com/office/drawing/2014/main" id="{3EA1367E-23A8-4947-B600-70F17797CBE5}"/>
               </a:ext>
             </a:extLst>
           </p:cNvPr>
@@ -3673,7 +3673,7 @@
           <p:cNvPr id="9" name="">
             <a:extLst xmlns:a="http://schemas.openxmlformats.org/drawingml/2006/main">
               <a:ext uri="{FF2B5EF4-FFF2-40B4-BE49-F238E27FC236}">
-                <a16:creationId xmlns:a16="http://schemas.microsoft.com/office/drawing/2014/main" id="{9B349E5D-8BBB-47D7-A624-EAE4ECDF0AD2}"/>
+                <a16:creationId xmlns:a16="http://schemas.microsoft.com/office/drawing/2014/main" id="{3F1E27EE-D703-4886-9D17-FB3C6832883E}"/>
               </a:ext>
             </a:extLst>
           </p:cNvPr>
@@ -3730,7 +3730,7 @@
           <p:cNvPr id="10" name="">
             <a:extLst xmlns:a="http://schemas.openxmlformats.org/drawingml/2006/main">
               <a:ext uri="{FF2B5EF4-FFF2-40B4-BE49-F238E27FC236}">
-                <a16:creationId xmlns:a16="http://schemas.microsoft.com/office/drawing/2014/main" id="{9CA8BE84-534C-42CF-9E3B-ED5AC8E28CA9}"/>
+                <a16:creationId xmlns:a16="http://schemas.microsoft.com/office/drawing/2014/main" id="{F202C9BF-161B-4772-8031-077E5BF7C066}"/>
               </a:ext>
             </a:extLst>
           </p:cNvPr>
@@ -3787,7 +3787,7 @@
           <p:cNvPr id="11" name="">
             <a:extLst xmlns:a="http://schemas.openxmlformats.org/drawingml/2006/main">
               <a:ext uri="{FF2B5EF4-FFF2-40B4-BE49-F238E27FC236}">
-                <a16:creationId xmlns:a16="http://schemas.microsoft.com/office/drawing/2014/main" id="{D2989871-1B64-4D44-AE06-657A9D714C5A}"/>
+                <a16:creationId xmlns:a16="http://schemas.microsoft.com/office/drawing/2014/main" id="{EFD0560B-668B-4EEB-8AA5-556CCA41D14D}"/>
               </a:ext>
             </a:extLst>
           </p:cNvPr>
@@ -3821,7 +3821,7 @@
           <p:cNvPr id="12" name="">
             <a:extLst xmlns:a="http://schemas.openxmlformats.org/drawingml/2006/main">
               <a:ext uri="{FF2B5EF4-FFF2-40B4-BE49-F238E27FC236}">
-                <a16:creationId xmlns:a16="http://schemas.microsoft.com/office/drawing/2014/main" id="{97E5E1D8-0FE2-44F3-81DA-AFA4CDAA3DE9}"/>
+                <a16:creationId xmlns:a16="http://schemas.microsoft.com/office/drawing/2014/main" id="{114290EF-D34F-4D45-BE3D-BC2F2D5051B7}"/>
               </a:ext>
             </a:extLst>
           </p:cNvPr>
@@ -3878,7 +3878,7 @@
           <p:cNvPr id="13" name="">
             <a:extLst xmlns:a="http://schemas.openxmlformats.org/drawingml/2006/main">
               <a:ext uri="{FF2B5EF4-FFF2-40B4-BE49-F238E27FC236}">
-                <a16:creationId xmlns:a16="http://schemas.microsoft.com/office/drawing/2014/main" id="{B7E1CCA9-FF4A-422D-8C9B-E549CE973E2B}"/>
+                <a16:creationId xmlns:a16="http://schemas.microsoft.com/office/drawing/2014/main" id="{0E43F21D-9718-4A69-B5D6-80920015B26E}"/>
               </a:ext>
             </a:extLst>
           </p:cNvPr>
@@ -3935,7 +3935,7 @@
           <p:cNvPr id="14" name="">
             <a:extLst xmlns:a="http://schemas.openxmlformats.org/drawingml/2006/main">
               <a:ext uri="{FF2B5EF4-FFF2-40B4-BE49-F238E27FC236}">
-                <a16:creationId xmlns:a16="http://schemas.microsoft.com/office/drawing/2014/main" id="{AE5ADD8D-3793-423A-9FAE-B3A9A6EC9B36}"/>
+                <a16:creationId xmlns:a16="http://schemas.microsoft.com/office/drawing/2014/main" id="{9BC11502-11A7-4327-9A99-FF3EB66432C8}"/>
               </a:ext>
             </a:extLst>
           </p:cNvPr>
@@ -3992,7 +3992,7 @@
           <p:cNvPr id="15" name="">
             <a:extLst xmlns:a="http://schemas.openxmlformats.org/drawingml/2006/main">
               <a:ext uri="{FF2B5EF4-FFF2-40B4-BE49-F238E27FC236}">
-                <a16:creationId xmlns:a16="http://schemas.microsoft.com/office/drawing/2014/main" id="{AE9B49BA-5780-45C6-BA69-C947E9E60C26}"/>
+                <a16:creationId xmlns:a16="http://schemas.microsoft.com/office/drawing/2014/main" id="{27A13C00-9C95-49D8-88FE-AD70BF8F9357}"/>
               </a:ext>
             </a:extLst>
           </p:cNvPr>
@@ -4026,7 +4026,7 @@
           <p:cNvPr id="16" name="">
             <a:extLst xmlns:a="http://schemas.openxmlformats.org/drawingml/2006/main">
               <a:ext uri="{FF2B5EF4-FFF2-40B4-BE49-F238E27FC236}">
-                <a16:creationId xmlns:a16="http://schemas.microsoft.com/office/drawing/2014/main" id="{A557F1DD-4219-460C-BAA9-71EC16AFE2A2}"/>
+                <a16:creationId xmlns:a16="http://schemas.microsoft.com/office/drawing/2014/main" id="{3D3E35B3-7B69-476D-8F2C-0A9BDCC4F898}"/>
               </a:ext>
             </a:extLst>
           </p:cNvPr>
@@ -4083,7 +4083,7 @@
           <p:cNvPr id="17" name="">
             <a:extLst xmlns:a="http://schemas.openxmlformats.org/drawingml/2006/main">
               <a:ext uri="{FF2B5EF4-FFF2-40B4-BE49-F238E27FC236}">
-                <a16:creationId xmlns:a16="http://schemas.microsoft.com/office/drawing/2014/main" id="{5FC54B5E-4A50-4F5F-B5F8-D6E20CE08D06}"/>
+                <a16:creationId xmlns:a16="http://schemas.microsoft.com/office/drawing/2014/main" id="{833819BA-B74C-42D8-9BF4-59A6AAAF316A}"/>
               </a:ext>
             </a:extLst>
           </p:cNvPr>
@@ -4140,7 +4140,7 @@
           <p:cNvPr id="18" name="">
             <a:extLst xmlns:a="http://schemas.openxmlformats.org/drawingml/2006/main">
               <a:ext uri="{FF2B5EF4-FFF2-40B4-BE49-F238E27FC236}">
-                <a16:creationId xmlns:a16="http://schemas.microsoft.com/office/drawing/2014/main" id="{DC3FDCEC-480F-4638-9A40-F8C775E6BA79}"/>
+                <a16:creationId xmlns:a16="http://schemas.microsoft.com/office/drawing/2014/main" id="{EA614C78-9690-4A34-B3FD-D22FDD6064D9}"/>
               </a:ext>
             </a:extLst>
           </p:cNvPr>
@@ -4195,7 +4195,7 @@
     </p:spTree>
     <p:extLst>
       <p:ext uri="{BB962C8B-B14F-4D97-AF65-F5344CB8AC3E}">
-        <p14:creationId xmlns:p14="http://schemas.microsoft.com/office/powerpoint/2010/main" val="1781628577"/>
+        <p14:creationId xmlns:p14="http://schemas.microsoft.com/office/powerpoint/2010/main" val="665718714"/>
       </p:ext>
     </p:extLst>
   </p:cSld>
@@ -4350,7 +4350,7 @@
           <p:cNvPr id="23" name="">
             <a:extLst xmlns:a="http://schemas.openxmlformats.org/drawingml/2006/main">
               <a:ext uri="{FF2B5EF4-FFF2-40B4-BE49-F238E27FC236}">
-                <a16:creationId xmlns:a16="http://schemas.microsoft.com/office/drawing/2014/main" id="{2FF237E2-B835-4CE2-B0D9-2FC15B0EF77B}"/>
+                <a16:creationId xmlns:a16="http://schemas.microsoft.com/office/drawing/2014/main" id="{90653FE4-1A62-4994-AC96-13F14DA3368E}"/>
               </a:ext>
             </a:extLst>
           </p:cNvPr>
@@ -4382,7 +4382,7 @@
           <p:cNvPr id="2" name="">
             <a:extLst xmlns:a="http://schemas.openxmlformats.org/drawingml/2006/main">
               <a:ext uri="{FF2B5EF4-FFF2-40B4-BE49-F238E27FC236}">
-                <a16:creationId xmlns:a16="http://schemas.microsoft.com/office/drawing/2014/main" id="{1C737464-CAEC-4792-80B4-F226127DC8BA}"/>
+                <a16:creationId xmlns:a16="http://schemas.microsoft.com/office/drawing/2014/main" id="{ECCDD1F7-8B3E-4221-A389-5164D3F6CB77}"/>
               </a:ext>
             </a:extLst>
           </p:cNvPr>
@@ -4439,7 +4439,7 @@
           <p:cNvPr id="3" name="">
             <a:extLst xmlns:a="http://schemas.openxmlformats.org/drawingml/2006/main">
               <a:ext uri="{FF2B5EF4-FFF2-40B4-BE49-F238E27FC236}">
-                <a16:creationId xmlns:a16="http://schemas.microsoft.com/office/drawing/2014/main" id="{1025AE02-A702-4AA9-B149-E548DA67A6E4}"/>
+                <a16:creationId xmlns:a16="http://schemas.microsoft.com/office/drawing/2014/main" id="{EF36CA47-D0EB-4DB4-A915-4A360DC63432}"/>
               </a:ext>
             </a:extLst>
           </p:cNvPr>
@@ -4471,7 +4471,7 @@
           <p:cNvPr id="4" name="">
             <a:extLst xmlns:a="http://schemas.openxmlformats.org/drawingml/2006/main">
               <a:ext uri="{FF2B5EF4-FFF2-40B4-BE49-F238E27FC236}">
-                <a16:creationId xmlns:a16="http://schemas.microsoft.com/office/drawing/2014/main" id="{8D1961DC-60B5-4F2F-8D6F-21647E1FA010}"/>
+                <a16:creationId xmlns:a16="http://schemas.microsoft.com/office/drawing/2014/main" id="{770605C0-6E88-4F26-A0E6-57D395BCD9A0}"/>
               </a:ext>
             </a:extLst>
           </p:cNvPr>
@@ -4528,7 +4528,7 @@
           <p:cNvPr id="5" name="">
             <a:extLst xmlns:a="http://schemas.openxmlformats.org/drawingml/2006/main">
               <a:ext uri="{FF2B5EF4-FFF2-40B4-BE49-F238E27FC236}">
-                <a16:creationId xmlns:a16="http://schemas.microsoft.com/office/drawing/2014/main" id="{BD6B69ED-E869-46F1-9BB9-24EB80586572}"/>
+                <a16:creationId xmlns:a16="http://schemas.microsoft.com/office/drawing/2014/main" id="{9E577C52-ABA5-4184-B4F7-15B40BC31778}"/>
               </a:ext>
             </a:extLst>
           </p:cNvPr>
@@ -4585,7 +4585,7 @@
           <p:cNvPr id="6" name="">
             <a:extLst xmlns:a="http://schemas.openxmlformats.org/drawingml/2006/main">
               <a:ext uri="{FF2B5EF4-FFF2-40B4-BE49-F238E27FC236}">
-                <a16:creationId xmlns:a16="http://schemas.microsoft.com/office/drawing/2014/main" id="{90C6CF4C-DE11-4274-B2F5-D07ACC4CC349}"/>
+                <a16:creationId xmlns:a16="http://schemas.microsoft.com/office/drawing/2014/main" id="{2B9498F7-CF5B-4C7E-A146-D6A0ED87251A}"/>
               </a:ext>
             </a:extLst>
           </p:cNvPr>
@@ -4642,7 +4642,7 @@
           <p:cNvPr id="7" name="">
             <a:extLst xmlns:a="http://schemas.openxmlformats.org/drawingml/2006/main">
               <a:ext uri="{FF2B5EF4-FFF2-40B4-BE49-F238E27FC236}">
-                <a16:creationId xmlns:a16="http://schemas.microsoft.com/office/drawing/2014/main" id="{24AF808C-B047-438B-85D3-2303E9EA2C34}"/>
+                <a16:creationId xmlns:a16="http://schemas.microsoft.com/office/drawing/2014/main" id="{E7250698-8A0A-43BE-833F-F784B7AD6ACF}"/>
               </a:ext>
             </a:extLst>
           </p:cNvPr>
@@ -4674,7 +4674,7 @@
           <p:cNvPr id="8" name="">
             <a:extLst xmlns:a="http://schemas.openxmlformats.org/drawingml/2006/main">
               <a:ext uri="{FF2B5EF4-FFF2-40B4-BE49-F238E27FC236}">
-                <a16:creationId xmlns:a16="http://schemas.microsoft.com/office/drawing/2014/main" id="{53758BB4-7E39-453C-895B-34B2CCA21DFF}"/>
+                <a16:creationId xmlns:a16="http://schemas.microsoft.com/office/drawing/2014/main" id="{24889E0B-522D-4DCB-9DB6-4E1ADC61E9FE}"/>
               </a:ext>
             </a:extLst>
           </p:cNvPr>
@@ -4731,7 +4731,7 @@
           <p:cNvPr id="9" name="">
             <a:extLst xmlns:a="http://schemas.openxmlformats.org/drawingml/2006/main">
               <a:ext uri="{FF2B5EF4-FFF2-40B4-BE49-F238E27FC236}">
-                <a16:creationId xmlns:a16="http://schemas.microsoft.com/office/drawing/2014/main" id="{EAC085F7-0FA5-430B-92C5-27F67F56ACB8}"/>
+                <a16:creationId xmlns:a16="http://schemas.microsoft.com/office/drawing/2014/main" id="{140970D3-0057-4BB1-9948-714AB64AF33F}"/>
               </a:ext>
             </a:extLst>
           </p:cNvPr>
@@ -4788,7 +4788,7 @@
           <p:cNvPr id="10" name="">
             <a:extLst xmlns:a="http://schemas.openxmlformats.org/drawingml/2006/main">
               <a:ext uri="{FF2B5EF4-FFF2-40B4-BE49-F238E27FC236}">
-                <a16:creationId xmlns:a16="http://schemas.microsoft.com/office/drawing/2014/main" id="{B5BA5840-F1E6-4F33-B4C0-0C3959992EC0}"/>
+                <a16:creationId xmlns:a16="http://schemas.microsoft.com/office/drawing/2014/main" id="{AB130550-94ED-4D02-8ABD-24E7A2758DA8}"/>
               </a:ext>
             </a:extLst>
           </p:cNvPr>
@@ -4822,7 +4822,7 @@
           <p:cNvPr id="11" name="">
             <a:extLst xmlns:a="http://schemas.openxmlformats.org/drawingml/2006/main">
               <a:ext uri="{FF2B5EF4-FFF2-40B4-BE49-F238E27FC236}">
-                <a16:creationId xmlns:a16="http://schemas.microsoft.com/office/drawing/2014/main" id="{0CDC35DB-C223-4595-B3DD-62142F4EE8FF}"/>
+                <a16:creationId xmlns:a16="http://schemas.microsoft.com/office/drawing/2014/main" id="{3F58D516-B9C3-4DB9-9127-E17ED7117416}"/>
               </a:ext>
             </a:extLst>
           </p:cNvPr>
@@ -4854,7 +4854,7 @@
           <p:cNvPr id="12" name="">
             <a:extLst xmlns:a="http://schemas.openxmlformats.org/drawingml/2006/main">
               <a:ext uri="{FF2B5EF4-FFF2-40B4-BE49-F238E27FC236}">
-                <a16:creationId xmlns:a16="http://schemas.microsoft.com/office/drawing/2014/main" id="{AC8D1667-C1C8-40D2-8E1E-5D524D4B4428}"/>
+                <a16:creationId xmlns:a16="http://schemas.microsoft.com/office/drawing/2014/main" id="{B1C6649F-E71F-4C8A-A24F-55A2C2FC1A18}"/>
               </a:ext>
             </a:extLst>
           </p:cNvPr>
@@ -4911,7 +4911,7 @@
           <p:cNvPr id="13" name="">
             <a:extLst xmlns:a="http://schemas.openxmlformats.org/drawingml/2006/main">
               <a:ext uri="{FF2B5EF4-FFF2-40B4-BE49-F238E27FC236}">
-                <a16:creationId xmlns:a16="http://schemas.microsoft.com/office/drawing/2014/main" id="{3409B5CC-716E-46A0-937D-E63545D9C57C}"/>
+                <a16:creationId xmlns:a16="http://schemas.microsoft.com/office/drawing/2014/main" id="{BC75B3C8-DFE1-409F-A7F4-28BA24835A02}"/>
               </a:ext>
             </a:extLst>
           </p:cNvPr>
@@ -4968,7 +4968,7 @@
           <p:cNvPr id="14" name="">
             <a:extLst xmlns:a="http://schemas.openxmlformats.org/drawingml/2006/main">
               <a:ext uri="{FF2B5EF4-FFF2-40B4-BE49-F238E27FC236}">
-                <a16:creationId xmlns:a16="http://schemas.microsoft.com/office/drawing/2014/main" id="{340380F3-5200-4BBD-AB6E-E8D467B8E34F}"/>
+                <a16:creationId xmlns:a16="http://schemas.microsoft.com/office/drawing/2014/main" id="{D3C52317-0325-47AA-B2A2-077CFFC5BF59}"/>
               </a:ext>
             </a:extLst>
           </p:cNvPr>
@@ -5002,7 +5002,7 @@
           <p:cNvPr id="15" name="">
             <a:extLst xmlns:a="http://schemas.openxmlformats.org/drawingml/2006/main">
               <a:ext uri="{FF2B5EF4-FFF2-40B4-BE49-F238E27FC236}">
-                <a16:creationId xmlns:a16="http://schemas.microsoft.com/office/drawing/2014/main" id="{C14623D6-DACC-4F96-853B-38DFE4185A8B}"/>
+                <a16:creationId xmlns:a16="http://schemas.microsoft.com/office/drawing/2014/main" id="{60C0E879-990E-4DEE-A409-C7CE37E7DA0A}"/>
               </a:ext>
             </a:extLst>
           </p:cNvPr>
@@ -5034,7 +5034,7 @@
           <p:cNvPr id="16" name="">
             <a:extLst xmlns:a="http://schemas.openxmlformats.org/drawingml/2006/main">
               <a:ext uri="{FF2B5EF4-FFF2-40B4-BE49-F238E27FC236}">
-                <a16:creationId xmlns:a16="http://schemas.microsoft.com/office/drawing/2014/main" id="{0A3D4BCC-F673-48A1-8746-046A10266098}"/>
+                <a16:creationId xmlns:a16="http://schemas.microsoft.com/office/drawing/2014/main" id="{11AFCEFA-B60C-47AA-808C-8060EE2F7332}"/>
               </a:ext>
             </a:extLst>
           </p:cNvPr>
@@ -5091,7 +5091,7 @@
           <p:cNvPr id="17" name="">
             <a:extLst xmlns:a="http://schemas.openxmlformats.org/drawingml/2006/main">
               <a:ext uri="{FF2B5EF4-FFF2-40B4-BE49-F238E27FC236}">
-                <a16:creationId xmlns:a16="http://schemas.microsoft.com/office/drawing/2014/main" id="{DE908699-395A-4582-859A-2A69887FEF57}"/>
+                <a16:creationId xmlns:a16="http://schemas.microsoft.com/office/drawing/2014/main" id="{784C0D04-0BBB-4F72-A1C0-468B69D56630}"/>
               </a:ext>
             </a:extLst>
           </p:cNvPr>
@@ -5148,7 +5148,7 @@
           <p:cNvPr id="18" name="">
             <a:extLst xmlns:a="http://schemas.openxmlformats.org/drawingml/2006/main">
               <a:ext uri="{FF2B5EF4-FFF2-40B4-BE49-F238E27FC236}">
-                <a16:creationId xmlns:a16="http://schemas.microsoft.com/office/drawing/2014/main" id="{CE2B5D37-7E5A-4283-BB2E-5D35DC9BC035}"/>
+                <a16:creationId xmlns:a16="http://schemas.microsoft.com/office/drawing/2014/main" id="{90C279DD-D64E-4BCB-9AE4-32F180457E85}"/>
               </a:ext>
             </a:extLst>
           </p:cNvPr>
@@ -5182,7 +5182,7 @@
           <p:cNvPr id="19" name="">
             <a:extLst xmlns:a="http://schemas.openxmlformats.org/drawingml/2006/main">
               <a:ext uri="{FF2B5EF4-FFF2-40B4-BE49-F238E27FC236}">
-                <a16:creationId xmlns:a16="http://schemas.microsoft.com/office/drawing/2014/main" id="{57D1E2BD-10A9-42C6-87F9-1C665E49DC86}"/>
+                <a16:creationId xmlns:a16="http://schemas.microsoft.com/office/drawing/2014/main" id="{CE193838-EB13-4BE5-87BA-D99FF5B6B8E0}"/>
               </a:ext>
             </a:extLst>
           </p:cNvPr>
@@ -5214,7 +5214,7 @@
           <p:cNvPr id="20" name="">
             <a:extLst xmlns:a="http://schemas.openxmlformats.org/drawingml/2006/main">
               <a:ext uri="{FF2B5EF4-FFF2-40B4-BE49-F238E27FC236}">
-                <a16:creationId xmlns:a16="http://schemas.microsoft.com/office/drawing/2014/main" id="{888655EF-8FA8-495C-8B17-C829D4E58F99}"/>
+                <a16:creationId xmlns:a16="http://schemas.microsoft.com/office/drawing/2014/main" id="{FE4C2DAB-D22D-475B-84CE-4DE272E269FB}"/>
               </a:ext>
             </a:extLst>
           </p:cNvPr>
@@ -5271,7 +5271,7 @@
           <p:cNvPr id="21" name="">
             <a:extLst xmlns:a="http://schemas.openxmlformats.org/drawingml/2006/main">
               <a:ext uri="{FF2B5EF4-FFF2-40B4-BE49-F238E27FC236}">
-                <a16:creationId xmlns:a16="http://schemas.microsoft.com/office/drawing/2014/main" id="{C70D87C8-5494-44DC-BFAA-C144F45BE8F2}"/>
+                <a16:creationId xmlns:a16="http://schemas.microsoft.com/office/drawing/2014/main" id="{4F059CBB-DDA9-48B0-9D2B-977FAA22FD68}"/>
               </a:ext>
             </a:extLst>
           </p:cNvPr>
@@ -5328,7 +5328,7 @@
           <p:cNvPr id="22" name="">
             <a:extLst xmlns:a="http://schemas.openxmlformats.org/drawingml/2006/main">
               <a:ext uri="{FF2B5EF4-FFF2-40B4-BE49-F238E27FC236}">
-                <a16:creationId xmlns:a16="http://schemas.microsoft.com/office/drawing/2014/main" id="{2C4976C2-B09E-4CBE-94F5-FA68E9C015FB}"/>
+                <a16:creationId xmlns:a16="http://schemas.microsoft.com/office/drawing/2014/main" id="{F32D2150-9C0A-455A-8690-3B659C331985}"/>
               </a:ext>
             </a:extLst>
           </p:cNvPr>
@@ -5383,7 +5383,7 @@
     </p:spTree>
     <p:extLst>
       <p:ext uri="{BB962C8B-B14F-4D97-AF65-F5344CB8AC3E}">
-        <p14:creationId xmlns:p14="http://schemas.microsoft.com/office/powerpoint/2010/main" val="632775593"/>
+        <p14:creationId xmlns:p14="http://schemas.microsoft.com/office/powerpoint/2010/main" val="1057333961"/>
       </p:ext>
     </p:extLst>
   </p:cSld>
@@ -5584,7 +5584,7 @@
           <p:cNvPr id="23" name="">
             <a:extLst xmlns:a="http://schemas.openxmlformats.org/drawingml/2006/main">
               <a:ext uri="{FF2B5EF4-FFF2-40B4-BE49-F238E27FC236}">
-                <a16:creationId xmlns:a16="http://schemas.microsoft.com/office/drawing/2014/main" id="{B181DAFD-25AB-4DF6-AB7E-B3C0DADD12DD}"/>
+                <a16:creationId xmlns:a16="http://schemas.microsoft.com/office/drawing/2014/main" id="{F1630048-9E32-4F83-99E8-E21AB96D3D0E}"/>
               </a:ext>
             </a:extLst>
           </p:cNvPr>
@@ -5616,7 +5616,7 @@
           <p:cNvPr id="2" name="">
             <a:extLst xmlns:a="http://schemas.openxmlformats.org/drawingml/2006/main">
               <a:ext uri="{FF2B5EF4-FFF2-40B4-BE49-F238E27FC236}">
-                <a16:creationId xmlns:a16="http://schemas.microsoft.com/office/drawing/2014/main" id="{F93FC56C-E772-4999-934C-56289663BFA0}"/>
+                <a16:creationId xmlns:a16="http://schemas.microsoft.com/office/drawing/2014/main" id="{17444B65-3F1F-4343-A58D-64D755F3F65D}"/>
               </a:ext>
             </a:extLst>
           </p:cNvPr>
@@ -5673,7 +5673,7 @@
           <p:cNvPr id="3" name="">
             <a:extLst xmlns:a="http://schemas.openxmlformats.org/drawingml/2006/main">
               <a:ext uri="{FF2B5EF4-FFF2-40B4-BE49-F238E27FC236}">
-                <a16:creationId xmlns:a16="http://schemas.microsoft.com/office/drawing/2014/main" id="{0E723F96-F54D-45D1-BBCA-A1D1C05AAD8F}"/>
+                <a16:creationId xmlns:a16="http://schemas.microsoft.com/office/drawing/2014/main" id="{BF21C4EA-EC48-4C30-A41D-97C7566A7156}"/>
               </a:ext>
             </a:extLst>
           </p:cNvPr>
@@ -5705,7 +5705,7 @@
           <p:cNvPr id="4" name="">
             <a:extLst xmlns:a="http://schemas.openxmlformats.org/drawingml/2006/main">
               <a:ext uri="{FF2B5EF4-FFF2-40B4-BE49-F238E27FC236}">
-                <a16:creationId xmlns:a16="http://schemas.microsoft.com/office/drawing/2014/main" id="{C78B515C-4D62-4028-8070-2AA6074F6184}"/>
+                <a16:creationId xmlns:a16="http://schemas.microsoft.com/office/drawing/2014/main" id="{0A8BECB1-36F0-4133-9D09-F760D1171FD2}"/>
               </a:ext>
             </a:extLst>
           </p:cNvPr>
@@ -5762,7 +5762,7 @@
           <p:cNvPr id="5" name="">
             <a:extLst xmlns:a="http://schemas.openxmlformats.org/drawingml/2006/main">
               <a:ext uri="{FF2B5EF4-FFF2-40B4-BE49-F238E27FC236}">
-                <a16:creationId xmlns:a16="http://schemas.microsoft.com/office/drawing/2014/main" id="{644AA87A-1B5A-4890-B154-9F3C177D3D77}"/>
+                <a16:creationId xmlns:a16="http://schemas.microsoft.com/office/drawing/2014/main" id="{3D9EA890-4D54-4AA7-9D36-D1D53F6800A2}"/>
               </a:ext>
             </a:extLst>
           </p:cNvPr>
@@ -5819,7 +5819,7 @@
           <p:cNvPr id="6" name="">
             <a:extLst xmlns:a="http://schemas.openxmlformats.org/drawingml/2006/main">
               <a:ext uri="{FF2B5EF4-FFF2-40B4-BE49-F238E27FC236}">
-                <a16:creationId xmlns:a16="http://schemas.microsoft.com/office/drawing/2014/main" id="{7B474289-B0D6-4B5D-AC5A-0FA006B15B14}"/>
+                <a16:creationId xmlns:a16="http://schemas.microsoft.com/office/drawing/2014/main" id="{8E0D8FAA-E001-48BF-B0D3-4DBEE92A9531}"/>
               </a:ext>
             </a:extLst>
           </p:cNvPr>
@@ -5876,7 +5876,7 @@
           <p:cNvPr id="7" name="">
             <a:extLst xmlns:a="http://schemas.openxmlformats.org/drawingml/2006/main">
               <a:ext uri="{FF2B5EF4-FFF2-40B4-BE49-F238E27FC236}">
-                <a16:creationId xmlns:a16="http://schemas.microsoft.com/office/drawing/2014/main" id="{BACF67BB-06D9-4B50-A74C-5BEB56915B01}"/>
+                <a16:creationId xmlns:a16="http://schemas.microsoft.com/office/drawing/2014/main" id="{E23C45AB-A37C-4174-8425-C46F3D27FA1B}"/>
               </a:ext>
             </a:extLst>
           </p:cNvPr>
@@ -5908,7 +5908,7 @@
           <p:cNvPr id="8" name="">
             <a:extLst xmlns:a="http://schemas.openxmlformats.org/drawingml/2006/main">
               <a:ext uri="{FF2B5EF4-FFF2-40B4-BE49-F238E27FC236}">
-                <a16:creationId xmlns:a16="http://schemas.microsoft.com/office/drawing/2014/main" id="{AB94273A-C268-45E0-B5BA-EDADFB96D2AC}"/>
+                <a16:creationId xmlns:a16="http://schemas.microsoft.com/office/drawing/2014/main" id="{B7BF08DF-4CC1-4AA4-95F3-5A0143AC457B}"/>
               </a:ext>
             </a:extLst>
           </p:cNvPr>
@@ -5965,7 +5965,7 @@
           <p:cNvPr id="9" name="">
             <a:extLst xmlns:a="http://schemas.openxmlformats.org/drawingml/2006/main">
               <a:ext uri="{FF2B5EF4-FFF2-40B4-BE49-F238E27FC236}">
-                <a16:creationId xmlns:a16="http://schemas.microsoft.com/office/drawing/2014/main" id="{26B50499-5538-43E2-AE41-BCD0D1BE5A0B}"/>
+                <a16:creationId xmlns:a16="http://schemas.microsoft.com/office/drawing/2014/main" id="{FBB70CC3-FD78-4297-B093-4B6D935F1296}"/>
               </a:ext>
             </a:extLst>
           </p:cNvPr>
@@ -6022,7 +6022,7 @@
           <p:cNvPr id="10" name="">
             <a:extLst xmlns:a="http://schemas.openxmlformats.org/drawingml/2006/main">
               <a:ext uri="{FF2B5EF4-FFF2-40B4-BE49-F238E27FC236}">
-                <a16:creationId xmlns:a16="http://schemas.microsoft.com/office/drawing/2014/main" id="{7DA52DDC-F6AB-4A5B-B7AB-DD982C5BF194}"/>
+                <a16:creationId xmlns:a16="http://schemas.microsoft.com/office/drawing/2014/main" id="{1DA95D5E-6FE3-42EE-BBA5-C5F3440FA0C7}"/>
               </a:ext>
             </a:extLst>
           </p:cNvPr>
@@ -6056,7 +6056,7 @@
           <p:cNvPr id="11" name="">
             <a:extLst xmlns:a="http://schemas.openxmlformats.org/drawingml/2006/main">
               <a:ext uri="{FF2B5EF4-FFF2-40B4-BE49-F238E27FC236}">
-                <a16:creationId xmlns:a16="http://schemas.microsoft.com/office/drawing/2014/main" id="{55A5668A-8780-4EA6-8361-1E12DDA0FCC7}"/>
+                <a16:creationId xmlns:a16="http://schemas.microsoft.com/office/drawing/2014/main" id="{60C44703-D25A-4A4B-9413-864069EAB247}"/>
               </a:ext>
             </a:extLst>
           </p:cNvPr>
@@ -6088,7 +6088,7 @@
           <p:cNvPr id="12" name="">
             <a:extLst xmlns:a="http://schemas.openxmlformats.org/drawingml/2006/main">
               <a:ext uri="{FF2B5EF4-FFF2-40B4-BE49-F238E27FC236}">
-                <a16:creationId xmlns:a16="http://schemas.microsoft.com/office/drawing/2014/main" id="{3902DFF3-4E4D-4187-A80E-8F12673D1C06}"/>
+                <a16:creationId xmlns:a16="http://schemas.microsoft.com/office/drawing/2014/main" id="{F4D80628-7678-4A49-B1C9-8EBF983E9815}"/>
               </a:ext>
             </a:extLst>
           </p:cNvPr>
@@ -6145,7 +6145,7 @@
           <p:cNvPr id="13" name="">
             <a:extLst xmlns:a="http://schemas.openxmlformats.org/drawingml/2006/main">
               <a:ext uri="{FF2B5EF4-FFF2-40B4-BE49-F238E27FC236}">
-                <a16:creationId xmlns:a16="http://schemas.microsoft.com/office/drawing/2014/main" id="{CDD8B83A-0142-48C1-86EE-9B7B2EDA0FFF}"/>
+                <a16:creationId xmlns:a16="http://schemas.microsoft.com/office/drawing/2014/main" id="{D85A0830-2448-4D79-8E5A-D00971EF8514}"/>
               </a:ext>
             </a:extLst>
           </p:cNvPr>
@@ -6202,7 +6202,7 @@
           <p:cNvPr id="14" name="">
             <a:extLst xmlns:a="http://schemas.openxmlformats.org/drawingml/2006/main">
               <a:ext uri="{FF2B5EF4-FFF2-40B4-BE49-F238E27FC236}">
-                <a16:creationId xmlns:a16="http://schemas.microsoft.com/office/drawing/2014/main" id="{F667411F-E321-4AC7-A254-4848928716AF}"/>
+                <a16:creationId xmlns:a16="http://schemas.microsoft.com/office/drawing/2014/main" id="{DA088B30-5F98-4FAF-85A0-8D8334AF9D8E}"/>
               </a:ext>
             </a:extLst>
           </p:cNvPr>
@@ -6236,7 +6236,7 @@
           <p:cNvPr id="15" name="">
             <a:extLst xmlns:a="http://schemas.openxmlformats.org/drawingml/2006/main">
               <a:ext uri="{FF2B5EF4-FFF2-40B4-BE49-F238E27FC236}">
-                <a16:creationId xmlns:a16="http://schemas.microsoft.com/office/drawing/2014/main" id="{3A3743DE-BF51-4329-9F90-FA461E651D60}"/>
+                <a16:creationId xmlns:a16="http://schemas.microsoft.com/office/drawing/2014/main" id="{E0C4730C-4B41-45B2-A382-785EDA8522DA}"/>
               </a:ext>
             </a:extLst>
           </p:cNvPr>
@@ -6268,7 +6268,7 @@
           <p:cNvPr id="16" name="">
             <a:extLst xmlns:a="http://schemas.openxmlformats.org/drawingml/2006/main">
               <a:ext uri="{FF2B5EF4-FFF2-40B4-BE49-F238E27FC236}">
-                <a16:creationId xmlns:a16="http://schemas.microsoft.com/office/drawing/2014/main" id="{FBC2702F-F21E-4E63-8F08-3AB16B2D3A3E}"/>
+                <a16:creationId xmlns:a16="http://schemas.microsoft.com/office/drawing/2014/main" id="{C7D926E3-DAF1-4618-8CEB-287C7443B4AD}"/>
               </a:ext>
             </a:extLst>
           </p:cNvPr>
@@ -6325,7 +6325,7 @@
           <p:cNvPr id="17" name="">
             <a:extLst xmlns:a="http://schemas.openxmlformats.org/drawingml/2006/main">
               <a:ext uri="{FF2B5EF4-FFF2-40B4-BE49-F238E27FC236}">
-                <a16:creationId xmlns:a16="http://schemas.microsoft.com/office/drawing/2014/main" id="{370CCEBA-8E57-43B4-B11A-254A9FFF78A9}"/>
+                <a16:creationId xmlns:a16="http://schemas.microsoft.com/office/drawing/2014/main" id="{575A307B-FDD8-4489-88D4-898B952B6650}"/>
               </a:ext>
             </a:extLst>
           </p:cNvPr>
@@ -6382,7 +6382,7 @@
           <p:cNvPr id="18" name="">
             <a:extLst xmlns:a="http://schemas.openxmlformats.org/drawingml/2006/main">
               <a:ext uri="{FF2B5EF4-FFF2-40B4-BE49-F238E27FC236}">
-                <a16:creationId xmlns:a16="http://schemas.microsoft.com/office/drawing/2014/main" id="{5A262EE9-5675-4696-BD8D-05301B3FB337}"/>
+                <a16:creationId xmlns:a16="http://schemas.microsoft.com/office/drawing/2014/main" id="{64558ED3-846E-4B73-B8C8-1C32668FF3CB}"/>
               </a:ext>
             </a:extLst>
           </p:cNvPr>
@@ -6416,7 +6416,7 @@
           <p:cNvPr id="19" name="">
             <a:extLst xmlns:a="http://schemas.openxmlformats.org/drawingml/2006/main">
               <a:ext uri="{FF2B5EF4-FFF2-40B4-BE49-F238E27FC236}">
-                <a16:creationId xmlns:a16="http://schemas.microsoft.com/office/drawing/2014/main" id="{415B2BA5-5307-41D5-9CBC-16315985F764}"/>
+                <a16:creationId xmlns:a16="http://schemas.microsoft.com/office/drawing/2014/main" id="{EBBACDF4-7523-471A-8900-177F34C2060B}"/>
               </a:ext>
             </a:extLst>
           </p:cNvPr>
@@ -6448,7 +6448,7 @@
           <p:cNvPr id="20" name="">
             <a:extLst xmlns:a="http://schemas.openxmlformats.org/drawingml/2006/main">
               <a:ext uri="{FF2B5EF4-FFF2-40B4-BE49-F238E27FC236}">
-                <a16:creationId xmlns:a16="http://schemas.microsoft.com/office/drawing/2014/main" id="{306D2ED3-75E6-493D-85DB-4BECEABBE521}"/>
+                <a16:creationId xmlns:a16="http://schemas.microsoft.com/office/drawing/2014/main" id="{33BCBB02-DB67-4BB0-BB85-DD6696F10493}"/>
               </a:ext>
             </a:extLst>
           </p:cNvPr>
@@ -6505,7 +6505,7 @@
           <p:cNvPr id="21" name="">
             <a:extLst xmlns:a="http://schemas.openxmlformats.org/drawingml/2006/main">
               <a:ext uri="{FF2B5EF4-FFF2-40B4-BE49-F238E27FC236}">
-                <a16:creationId xmlns:a16="http://schemas.microsoft.com/office/drawing/2014/main" id="{41A5456F-5D52-4799-A023-EA3687EB218E}"/>
+                <a16:creationId xmlns:a16="http://schemas.microsoft.com/office/drawing/2014/main" id="{CB61D8D6-D2C8-4A76-8A6F-0B4397158336}"/>
               </a:ext>
             </a:extLst>
           </p:cNvPr>
@@ -6562,7 +6562,7 @@
           <p:cNvPr id="22" name="">
             <a:extLst xmlns:a="http://schemas.openxmlformats.org/drawingml/2006/main">
               <a:ext uri="{FF2B5EF4-FFF2-40B4-BE49-F238E27FC236}">
-                <a16:creationId xmlns:a16="http://schemas.microsoft.com/office/drawing/2014/main" id="{5A5DE6AE-4EB3-415A-A73C-A927DDC0D502}"/>
+                <a16:creationId xmlns:a16="http://schemas.microsoft.com/office/drawing/2014/main" id="{557FEFC3-B2F2-43AC-8329-022D3633C378}"/>
               </a:ext>
             </a:extLst>
           </p:cNvPr>
@@ -6617,7 +6617,7 @@
     </p:spTree>
     <p:extLst>
       <p:ext uri="{BB962C8B-B14F-4D97-AF65-F5344CB8AC3E}">
-        <p14:creationId xmlns:p14="http://schemas.microsoft.com/office/powerpoint/2010/main" val="9923614"/>
+        <p14:creationId xmlns:p14="http://schemas.microsoft.com/office/powerpoint/2010/main" val="794273752"/>
       </p:ext>
     </p:extLst>
   </p:cSld>
@@ -6818,7 +6818,7 @@
           <p:cNvPr id="16" name="">
             <a:extLst xmlns:a="http://schemas.openxmlformats.org/drawingml/2006/main">
               <a:ext uri="{FF2B5EF4-FFF2-40B4-BE49-F238E27FC236}">
-                <a16:creationId xmlns:a16="http://schemas.microsoft.com/office/drawing/2014/main" id="{FC13B5AE-9328-4295-AFC7-DEFC661057CF}"/>
+                <a16:creationId xmlns:a16="http://schemas.microsoft.com/office/drawing/2014/main" id="{C72D0664-659B-4A37-9301-F8FBF10BE607}"/>
               </a:ext>
             </a:extLst>
           </p:cNvPr>
@@ -6850,7 +6850,7 @@
           <p:cNvPr id="2" name="">
             <a:extLst xmlns:a="http://schemas.openxmlformats.org/drawingml/2006/main">
               <a:ext uri="{FF2B5EF4-FFF2-40B4-BE49-F238E27FC236}">
-                <a16:creationId xmlns:a16="http://schemas.microsoft.com/office/drawing/2014/main" id="{72B3AFD4-FF1A-4EFD-B2A8-C386687A40D9}"/>
+                <a16:creationId xmlns:a16="http://schemas.microsoft.com/office/drawing/2014/main" id="{833C068B-2097-43C8-9B58-5B96D8CB6B99}"/>
               </a:ext>
             </a:extLst>
           </p:cNvPr>
@@ -6907,7 +6907,7 @@
           <p:cNvPr id="3" name="">
             <a:extLst xmlns:a="http://schemas.openxmlformats.org/drawingml/2006/main">
               <a:ext uri="{FF2B5EF4-FFF2-40B4-BE49-F238E27FC236}">
-                <a16:creationId xmlns:a16="http://schemas.microsoft.com/office/drawing/2014/main" id="{0AE7AFC9-8C21-41B9-A37D-B516404A274F}"/>
+                <a16:creationId xmlns:a16="http://schemas.microsoft.com/office/drawing/2014/main" id="{E3A97DEC-81D3-43AB-A853-D009BA10360F}"/>
               </a:ext>
             </a:extLst>
           </p:cNvPr>
@@ -6939,7 +6939,7 @@
           <p:cNvPr id="4" name="">
             <a:extLst xmlns:a="http://schemas.openxmlformats.org/drawingml/2006/main">
               <a:ext uri="{FF2B5EF4-FFF2-40B4-BE49-F238E27FC236}">
-                <a16:creationId xmlns:a16="http://schemas.microsoft.com/office/drawing/2014/main" id="{039ADCB0-D947-47F3-89DC-5C292C21D6C1}"/>
+                <a16:creationId xmlns:a16="http://schemas.microsoft.com/office/drawing/2014/main" id="{3FEFC0B5-3A24-4939-AB28-AE470B1B46CF}"/>
               </a:ext>
             </a:extLst>
           </p:cNvPr>
@@ -6996,7 +6996,7 @@
           <p:cNvPr id="5" name="">
             <a:extLst xmlns:a="http://schemas.openxmlformats.org/drawingml/2006/main">
               <a:ext uri="{FF2B5EF4-FFF2-40B4-BE49-F238E27FC236}">
-                <a16:creationId xmlns:a16="http://schemas.microsoft.com/office/drawing/2014/main" id="{6CC37827-290B-43E9-8F02-14E94DC398F6}"/>
+                <a16:creationId xmlns:a16="http://schemas.microsoft.com/office/drawing/2014/main" id="{3B71AEBA-B1B6-43F8-9B4A-5D955C7488B0}"/>
               </a:ext>
             </a:extLst>
           </p:cNvPr>
@@ -7053,7 +7053,7 @@
           <p:cNvPr id="6" name="">
             <a:extLst xmlns:a="http://schemas.openxmlformats.org/drawingml/2006/main">
               <a:ext uri="{FF2B5EF4-FFF2-40B4-BE49-F238E27FC236}">
-                <a16:creationId xmlns:a16="http://schemas.microsoft.com/office/drawing/2014/main" id="{791EB2CE-6743-4FB6-8FB2-53FD3AE64FEB}"/>
+                <a16:creationId xmlns:a16="http://schemas.microsoft.com/office/drawing/2014/main" id="{105E7C7D-016D-48E5-9ABE-A93805EA4EC2}"/>
               </a:ext>
             </a:extLst>
           </p:cNvPr>
@@ -7110,7 +7110,7 @@
           <p:cNvPr id="7" name="">
             <a:extLst xmlns:a="http://schemas.openxmlformats.org/drawingml/2006/main">
               <a:ext uri="{FF2B5EF4-FFF2-40B4-BE49-F238E27FC236}">
-                <a16:creationId xmlns:a16="http://schemas.microsoft.com/office/drawing/2014/main" id="{7A6CE69A-2E60-43B3-B6C0-6835B4D7AD7A}"/>
+                <a16:creationId xmlns:a16="http://schemas.microsoft.com/office/drawing/2014/main" id="{CA2ACDFC-DE15-4579-8FD2-B44089E4493A}"/>
               </a:ext>
             </a:extLst>
           </p:cNvPr>
@@ -7142,7 +7142,7 @@
           <p:cNvPr id="8" name="">
             <a:extLst xmlns:a="http://schemas.openxmlformats.org/drawingml/2006/main">
               <a:ext uri="{FF2B5EF4-FFF2-40B4-BE49-F238E27FC236}">
-                <a16:creationId xmlns:a16="http://schemas.microsoft.com/office/drawing/2014/main" id="{A55E8E41-BCA3-4E5A-A6D9-47E9451F8A68}"/>
+                <a16:creationId xmlns:a16="http://schemas.microsoft.com/office/drawing/2014/main" id="{4FFC0800-C80D-4D8E-BCAE-2BA0E4F1B139}"/>
               </a:ext>
             </a:extLst>
           </p:cNvPr>
@@ -7199,7 +7199,7 @@
           <p:cNvPr id="9" name="">
             <a:extLst xmlns:a="http://schemas.openxmlformats.org/drawingml/2006/main">
               <a:ext uri="{FF2B5EF4-FFF2-40B4-BE49-F238E27FC236}">
-                <a16:creationId xmlns:a16="http://schemas.microsoft.com/office/drawing/2014/main" id="{5D4A77DD-93BC-4F33-B4FC-C836BFC63469}"/>
+                <a16:creationId xmlns:a16="http://schemas.microsoft.com/office/drawing/2014/main" id="{C8C589F4-C062-4C8F-B51E-1EBEB62EA464}"/>
               </a:ext>
             </a:extLst>
           </p:cNvPr>
@@ -7256,7 +7256,7 @@
           <p:cNvPr id="10" name="">
             <a:extLst xmlns:a="http://schemas.openxmlformats.org/drawingml/2006/main">
               <a:ext uri="{FF2B5EF4-FFF2-40B4-BE49-F238E27FC236}">
-                <a16:creationId xmlns:a16="http://schemas.microsoft.com/office/drawing/2014/main" id="{8E8D74E8-AD01-43BB-ACD3-EC4C39D35989}"/>
+                <a16:creationId xmlns:a16="http://schemas.microsoft.com/office/drawing/2014/main" id="{20DC8FD3-1EC6-4B93-8C82-5B3C57481F94}"/>
               </a:ext>
             </a:extLst>
           </p:cNvPr>
@@ -7313,7 +7313,7 @@
           <p:cNvPr id="11" name="">
             <a:extLst xmlns:a="http://schemas.openxmlformats.org/drawingml/2006/main">
               <a:ext uri="{FF2B5EF4-FFF2-40B4-BE49-F238E27FC236}">
-                <a16:creationId xmlns:a16="http://schemas.microsoft.com/office/drawing/2014/main" id="{0D62B191-EDDB-4478-BE21-247B6CD37E41}"/>
+                <a16:creationId xmlns:a16="http://schemas.microsoft.com/office/drawing/2014/main" id="{A899A19A-5CC8-440C-98D9-49DC44816CC8}"/>
               </a:ext>
             </a:extLst>
           </p:cNvPr>
@@ -7345,7 +7345,7 @@
           <p:cNvPr id="12" name="">
             <a:extLst xmlns:a="http://schemas.openxmlformats.org/drawingml/2006/main">
               <a:ext uri="{FF2B5EF4-FFF2-40B4-BE49-F238E27FC236}">
-                <a16:creationId xmlns:a16="http://schemas.microsoft.com/office/drawing/2014/main" id="{9D326020-C62C-4D98-A83B-203AAE03BC9C}"/>
+                <a16:creationId xmlns:a16="http://schemas.microsoft.com/office/drawing/2014/main" id="{A29866CA-3F8E-45AA-AC5D-101989CD50EE}"/>
               </a:ext>
             </a:extLst>
           </p:cNvPr>
@@ -7402,7 +7402,7 @@
           <p:cNvPr id="13" name="">
             <a:extLst xmlns:a="http://schemas.openxmlformats.org/drawingml/2006/main">
               <a:ext uri="{FF2B5EF4-FFF2-40B4-BE49-F238E27FC236}">
-                <a16:creationId xmlns:a16="http://schemas.microsoft.com/office/drawing/2014/main" id="{CA031D39-F8F8-4B9B-921F-28C27B36DEFA}"/>
+                <a16:creationId xmlns:a16="http://schemas.microsoft.com/office/drawing/2014/main" id="{B47F37D1-8486-4502-994B-EF49ED3B0D6F}"/>
               </a:ext>
             </a:extLst>
           </p:cNvPr>
@@ -7459,7 +7459,7 @@
           <p:cNvPr id="14" name="">
             <a:extLst xmlns:a="http://schemas.openxmlformats.org/drawingml/2006/main">
               <a:ext uri="{FF2B5EF4-FFF2-40B4-BE49-F238E27FC236}">
-                <a16:creationId xmlns:a16="http://schemas.microsoft.com/office/drawing/2014/main" id="{C43AD72E-FC25-4377-B027-94E148428395}"/>
+                <a16:creationId xmlns:a16="http://schemas.microsoft.com/office/drawing/2014/main" id="{5C316DC1-9ACB-4CBD-BC34-F5A06668CBF1}"/>
               </a:ext>
             </a:extLst>
           </p:cNvPr>
@@ -7516,7 +7516,7 @@
           <p:cNvPr id="15" name="">
             <a:extLst xmlns:a="http://schemas.openxmlformats.org/drawingml/2006/main">
               <a:ext uri="{FF2B5EF4-FFF2-40B4-BE49-F238E27FC236}">
-                <a16:creationId xmlns:a16="http://schemas.microsoft.com/office/drawing/2014/main" id="{027F69CD-B8D9-4165-996D-EEFD917F9A63}"/>
+                <a16:creationId xmlns:a16="http://schemas.microsoft.com/office/drawing/2014/main" id="{D840DC23-8315-40B7-9697-AB5B38EB372C}"/>
               </a:ext>
             </a:extLst>
           </p:cNvPr>
@@ -7571,7 +7571,7 @@
     </p:spTree>
     <p:extLst>
       <p:ext uri="{BB962C8B-B14F-4D97-AF65-F5344CB8AC3E}">
-        <p14:creationId xmlns:p14="http://schemas.microsoft.com/office/powerpoint/2010/main" val="1594795575"/>
+        <p14:creationId xmlns:p14="http://schemas.microsoft.com/office/powerpoint/2010/main" val="1520768603"/>
       </p:ext>
     </p:extLst>
   </p:cSld>
@@ -7769,10 +7769,10 @@
       </p:grpSpPr>
       <p:sp>
         <p:nvSpPr>
-          <p:cNvPr id="21" name="">
-            <a:extLst xmlns:a="http://schemas.openxmlformats.org/drawingml/2006/main">
-              <a:ext uri="{FF2B5EF4-FFF2-40B4-BE49-F238E27FC236}">
-                <a16:creationId xmlns:a16="http://schemas.microsoft.com/office/drawing/2014/main" id="{93879071-A0C5-47BB-95F3-3C4663F7924F}"/>
+          <p:cNvPr id="29" name="">
+            <a:extLst xmlns:a="http://schemas.openxmlformats.org/drawingml/2006/main">
+              <a:ext uri="{FF2B5EF4-FFF2-40B4-BE49-F238E27FC236}">
+                <a16:creationId xmlns:a16="http://schemas.microsoft.com/office/drawing/2014/main" id="{D370A9A8-76FC-4E67-877A-0E380FDC8ED8}"/>
               </a:ext>
             </a:extLst>
           </p:cNvPr>
@@ -7804,7 +7804,7 @@
           <p:cNvPr id="2" name="">
             <a:extLst xmlns:a="http://schemas.openxmlformats.org/drawingml/2006/main">
               <a:ext uri="{FF2B5EF4-FFF2-40B4-BE49-F238E27FC236}">
-                <a16:creationId xmlns:a16="http://schemas.microsoft.com/office/drawing/2014/main" id="{8B1524EB-6A9E-48F3-BB73-524ADCBFB9BE}"/>
+                <a16:creationId xmlns:a16="http://schemas.microsoft.com/office/drawing/2014/main" id="{9268C823-A456-4CA8-B1E9-5A5A44F25043}"/>
               </a:ext>
             </a:extLst>
           </p:cNvPr>
@@ -7861,7 +7861,7 @@
           <p:cNvPr id="3" name="">
             <a:extLst xmlns:a="http://schemas.openxmlformats.org/drawingml/2006/main">
               <a:ext uri="{FF2B5EF4-FFF2-40B4-BE49-F238E27FC236}">
-                <a16:creationId xmlns:a16="http://schemas.microsoft.com/office/drawing/2014/main" id="{16645496-06B7-44FF-93EE-70E3DC9F16F2}"/>
+                <a16:creationId xmlns:a16="http://schemas.microsoft.com/office/drawing/2014/main" id="{DABD9AC8-B0B3-4534-B0C8-0B03E5F0596D}"/>
               </a:ext>
             </a:extLst>
           </p:cNvPr>
@@ -7893,7 +7893,7 @@
           <p:cNvPr id="4" name="">
             <a:extLst xmlns:a="http://schemas.openxmlformats.org/drawingml/2006/main">
               <a:ext uri="{FF2B5EF4-FFF2-40B4-BE49-F238E27FC236}">
-                <a16:creationId xmlns:a16="http://schemas.microsoft.com/office/drawing/2014/main" id="{5E21010A-9F75-44A5-90D8-265720244129}"/>
+                <a16:creationId xmlns:a16="http://schemas.microsoft.com/office/drawing/2014/main" id="{4071172E-C190-4AD2-A5B4-369D9DB986E1}"/>
               </a:ext>
             </a:extLst>
           </p:cNvPr>
@@ -7950,7 +7950,7 @@
           <p:cNvPr id="5" name="">
             <a:extLst xmlns:a="http://schemas.openxmlformats.org/drawingml/2006/main">
               <a:ext uri="{FF2B5EF4-FFF2-40B4-BE49-F238E27FC236}">
-                <a16:creationId xmlns:a16="http://schemas.microsoft.com/office/drawing/2014/main" id="{E6069C15-4FB1-4133-BDB6-EE3B35CB5A14}"/>
+                <a16:creationId xmlns:a16="http://schemas.microsoft.com/office/drawing/2014/main" id="{91A8FBAE-E74C-4BB1-97F9-F297DC397BBA}"/>
               </a:ext>
             </a:extLst>
           </p:cNvPr>
@@ -8007,7 +8007,7 @@
           <p:cNvPr id="6" name="">
             <a:extLst xmlns:a="http://schemas.openxmlformats.org/drawingml/2006/main">
               <a:ext uri="{FF2B5EF4-FFF2-40B4-BE49-F238E27FC236}">
-                <a16:creationId xmlns:a16="http://schemas.microsoft.com/office/drawing/2014/main" id="{4ABC6CA4-422F-4DD7-B674-FB6B3542F9D4}"/>
+                <a16:creationId xmlns:a16="http://schemas.microsoft.com/office/drawing/2014/main" id="{6317DC53-6D3E-4FD5-9613-5B5219BAD96B}"/>
               </a:ext>
             </a:extLst>
           </p:cNvPr>
@@ -8064,7 +8064,7 @@
           <p:cNvPr id="7" name="">
             <a:extLst xmlns:a="http://schemas.openxmlformats.org/drawingml/2006/main">
               <a:ext uri="{FF2B5EF4-FFF2-40B4-BE49-F238E27FC236}">
-                <a16:creationId xmlns:a16="http://schemas.microsoft.com/office/drawing/2014/main" id="{83420116-3344-440F-93B6-6B56EB3C3C2A}"/>
+                <a16:creationId xmlns:a16="http://schemas.microsoft.com/office/drawing/2014/main" id="{0819C08F-42CD-4CF7-B82B-D0D7CA076639}"/>
               </a:ext>
             </a:extLst>
           </p:cNvPr>
@@ -8096,7 +8096,7 @@
           <p:cNvPr id="8" name="">
             <a:extLst xmlns:a="http://schemas.openxmlformats.org/drawingml/2006/main">
               <a:ext uri="{FF2B5EF4-FFF2-40B4-BE49-F238E27FC236}">
-                <a16:creationId xmlns:a16="http://schemas.microsoft.com/office/drawing/2014/main" id="{5BA74FD7-80BA-4EEC-BE9F-AA735B84074D}"/>
+                <a16:creationId xmlns:a16="http://schemas.microsoft.com/office/drawing/2014/main" id="{F73B84B7-EB11-4CC9-A896-D3411F194610}"/>
               </a:ext>
             </a:extLst>
           </p:cNvPr>
@@ -8153,7 +8153,7 @@
           <p:cNvPr id="9" name="">
             <a:extLst xmlns:a="http://schemas.openxmlformats.org/drawingml/2006/main">
               <a:ext uri="{FF2B5EF4-FFF2-40B4-BE49-F238E27FC236}">
-                <a16:creationId xmlns:a16="http://schemas.microsoft.com/office/drawing/2014/main" id="{ABD70D90-A12B-43B8-B92E-C28A70CE86B3}"/>
+                <a16:creationId xmlns:a16="http://schemas.microsoft.com/office/drawing/2014/main" id="{E5B8FB60-76C7-414F-9407-E38E0F58C8B9}"/>
               </a:ext>
             </a:extLst>
           </p:cNvPr>
@@ -8210,19 +8210,19 @@
           <p:cNvPr id="10" name="">
             <a:extLst xmlns:a="http://schemas.openxmlformats.org/drawingml/2006/main">
               <a:ext uri="{FF2B5EF4-FFF2-40B4-BE49-F238E27FC236}">
-                <a16:creationId xmlns:a16="http://schemas.microsoft.com/office/drawing/2014/main" id="{3D0041D7-8D20-43B4-8C04-1EB8383D540A}"/>
-              </a:ext>
-            </a:extLst>
-          </p:cNvPr>
-          <p:cNvSpPr>
-            <a:spLocks xmlns:a="http://schemas.openxmlformats.org/drawingml/2006/main" noGrp="1"/>
-          </p:cNvSpPr>
-          <p:nvPr/>
-        </p:nvSpPr>
-        <p:spPr>
-          <a:xfrm xmlns:a="http://schemas.openxmlformats.org/drawingml/2006/main">
-            <a:off x="914400" y="1257300"/>
-            <a:ext cx="10363200" cy="781050"/>
+                <a16:creationId xmlns:a16="http://schemas.microsoft.com/office/drawing/2014/main" id="{0FA25B1C-413D-4F1F-8529-BC4C14F4E305}"/>
+              </a:ext>
+            </a:extLst>
+          </p:cNvPr>
+          <p:cNvSpPr>
+            <a:spLocks xmlns:a="http://schemas.openxmlformats.org/drawingml/2006/main" noGrp="1"/>
+          </p:cNvSpPr>
+          <p:nvPr/>
+        </p:nvSpPr>
+        <p:spPr>
+          <a:xfrm xmlns:a="http://schemas.openxmlformats.org/drawingml/2006/main">
+            <a:off x="857250" y="1219200"/>
+            <a:ext cx="10477500" cy="742950"/>
           </a:xfrm>
           <a:prstGeom xmlns:a="http://schemas.openxmlformats.org/drawingml/2006/main" prst="rect">
             <a:avLst/>
@@ -8239,7 +8239,7 @@
           <a:lstStyle xmlns:a="http://schemas.openxmlformats.org/drawingml/2006/main"/>
           <a:p xmlns:a="http://schemas.openxmlformats.org/drawingml/2006/main">
             <a:pPr algn="ctr">
-              <a:defRPr sz="2175" b="1">
+              <a:defRPr sz="2100" b="1">
                 <a:solidFill>
                   <a:srgbClr val="17253A"/>
                 </a:solidFill>
@@ -8249,7 +8249,7 @@
               </a:defRPr>
             </a:pPr>
             <a:r>
-              <a:rPr sz="2175" b="1">
+              <a:rPr sz="2100" b="1">
                 <a:solidFill>
                   <a:srgbClr val="17253A"/>
                 </a:solidFill>
@@ -8267,29 +8267,173 @@
           <p:cNvPr id="11" name="">
             <a:extLst xmlns:a="http://schemas.openxmlformats.org/drawingml/2006/main">
               <a:ext uri="{FF2B5EF4-FFF2-40B4-BE49-F238E27FC236}">
-                <a16:creationId xmlns:a16="http://schemas.microsoft.com/office/drawing/2014/main" id="{D8DB46B8-5AAD-4615-94A0-26A032D5A811}"/>
-              </a:ext>
-            </a:extLst>
-          </p:cNvPr>
-          <p:cNvSpPr>
-            <a:spLocks xmlns:a="http://schemas.openxmlformats.org/drawingml/2006/main" noGrp="1"/>
-          </p:cNvSpPr>
-          <p:nvPr/>
-        </p:nvSpPr>
-        <p:spPr>
-          <a:xfrm xmlns:a="http://schemas.openxmlformats.org/drawingml/2006/main">
-            <a:off x="685800" y="2247900"/>
-            <a:ext cx="3905250" cy="3333750"/>
-          </a:xfrm>
-          <a:prstGeom xmlns:a="http://schemas.openxmlformats.org/drawingml/2006/main" prst="roundRect">
-            <a:avLst>
-              <a:gd name="adj" fmla="val 2286"/>
-            </a:avLst>
+                <a16:creationId xmlns:a16="http://schemas.microsoft.com/office/drawing/2014/main" id="{B4791EAC-6331-45BC-B93B-425553A09356}"/>
+              </a:ext>
+            </a:extLst>
+          </p:cNvPr>
+          <p:cNvSpPr>
+            <a:spLocks xmlns:a="http://schemas.openxmlformats.org/drawingml/2006/main" noGrp="1"/>
+          </p:cNvSpPr>
+          <p:nvPr/>
+        </p:nvSpPr>
+        <p:spPr>
+          <a:xfrm xmlns:a="http://schemas.openxmlformats.org/drawingml/2006/main">
+            <a:off x="971550" y="2124075"/>
+            <a:ext cx="38100" cy="3524250"/>
+          </a:xfrm>
+          <a:prstGeom xmlns:a="http://schemas.openxmlformats.org/drawingml/2006/main" prst="rect">
+            <a:avLst/>
           </a:prstGeom>
           <a:solidFill xmlns:a="http://schemas.openxmlformats.org/drawingml/2006/main">
-            <a:srgbClr val="FFFFFF"/>
+            <a:srgbClr val="2C6E73"/>
           </a:solidFill>
-          <a:ln xmlns:a="http://schemas.openxmlformats.org/drawingml/2006/main" w="12383">
+          <a:ln xmlns:a="http://schemas.openxmlformats.org/drawingml/2006/main" w="0">
+            <a:solidFill>
+              <a:srgbClr val="2C6E73"/>
+            </a:solidFill>
+          </a:ln>
+        </p:spPr>
+      </p:sp>
+      <p:sp>
+        <p:nvSpPr>
+          <p:cNvPr id="12" name="">
+            <a:extLst xmlns:a="http://schemas.openxmlformats.org/drawingml/2006/main">
+              <a:ext uri="{FF2B5EF4-FFF2-40B4-BE49-F238E27FC236}">
+                <a16:creationId xmlns:a16="http://schemas.microsoft.com/office/drawing/2014/main" id="{C534FB0C-82F7-447B-AE1A-FB841FAA10FF}"/>
+              </a:ext>
+            </a:extLst>
+          </p:cNvPr>
+          <p:cNvSpPr>
+            <a:spLocks xmlns:a="http://schemas.openxmlformats.org/drawingml/2006/main" noGrp="1"/>
+          </p:cNvSpPr>
+          <p:nvPr/>
+        </p:nvSpPr>
+        <p:spPr>
+          <a:xfrm xmlns:a="http://schemas.openxmlformats.org/drawingml/2006/main">
+            <a:off x="1162050" y="2200275"/>
+            <a:ext cx="400050" cy="400050"/>
+          </a:xfrm>
+          <a:prstGeom xmlns:a="http://schemas.openxmlformats.org/drawingml/2006/main" prst="rect">
+            <a:avLst/>
+          </a:prstGeom>
+          <a:noFill xmlns:a="http://schemas.openxmlformats.org/drawingml/2006/main"/>
+          <a:ln xmlns:a="http://schemas.openxmlformats.org/drawingml/2006/main" w="0">
+            <a:noFill/>
+          </a:ln>
+        </p:spPr>
+        <p:txBody>
+          <a:bodyPr xmlns:a="http://schemas.openxmlformats.org/drawingml/2006/main" anchor="ctr">
+            <a:normAutofit fontScale="100000"/>
+          </a:bodyPr>
+          <a:lstStyle xmlns:a="http://schemas.openxmlformats.org/drawingml/2006/main"/>
+          <a:p xmlns:a="http://schemas.openxmlformats.org/drawingml/2006/main">
+            <a:pPr algn="ctr">
+              <a:defRPr sz="1125" b="1">
+                <a:solidFill>
+                  <a:srgbClr val="2C6E73"/>
+                </a:solidFill>
+                <a:latin typeface="Arial"/>
+                <a:ea typeface="Arial"/>
+                <a:cs typeface="Arial"/>
+              </a:defRPr>
+            </a:pPr>
+            <a:r>
+              <a:rPr sz="1125" b="1">
+                <a:solidFill>
+                  <a:srgbClr val="2C6E73"/>
+                </a:solidFill>
+                <a:latin typeface="Arial"/>
+                <a:ea typeface="Arial"/>
+                <a:cs typeface="Arial"/>
+              </a:rPr>
+              <a:t>1</a:t>
+            </a:r>
+          </a:p>
+        </p:txBody>
+      </p:sp>
+      <p:sp>
+        <p:nvSpPr>
+          <p:cNvPr id="13" name="">
+            <a:extLst xmlns:a="http://schemas.openxmlformats.org/drawingml/2006/main">
+              <a:ext uri="{FF2B5EF4-FFF2-40B4-BE49-F238E27FC236}">
+                <a16:creationId xmlns:a16="http://schemas.microsoft.com/office/drawing/2014/main" id="{B454B777-40A6-4FAD-B21E-BDEB727BBDB2}"/>
+              </a:ext>
+            </a:extLst>
+          </p:cNvPr>
+          <p:cNvSpPr>
+            <a:spLocks xmlns:a="http://schemas.openxmlformats.org/drawingml/2006/main" noGrp="1"/>
+          </p:cNvSpPr>
+          <p:nvPr/>
+        </p:nvSpPr>
+        <p:spPr>
+          <a:xfrm xmlns:a="http://schemas.openxmlformats.org/drawingml/2006/main">
+            <a:off x="1714500" y="2114550"/>
+            <a:ext cx="9525000" cy="514350"/>
+          </a:xfrm>
+          <a:prstGeom xmlns:a="http://schemas.openxmlformats.org/drawingml/2006/main" prst="rect">
+            <a:avLst/>
+          </a:prstGeom>
+          <a:noFill xmlns:a="http://schemas.openxmlformats.org/drawingml/2006/main"/>
+          <a:ln xmlns:a="http://schemas.openxmlformats.org/drawingml/2006/main" w="0">
+            <a:noFill/>
+          </a:ln>
+        </p:spPr>
+        <p:txBody>
+          <a:bodyPr xmlns:a="http://schemas.openxmlformats.org/drawingml/2006/main" anchor="ctr">
+            <a:normAutofit fontScale="100000"/>
+          </a:bodyPr>
+          <a:lstStyle xmlns:a="http://schemas.openxmlformats.org/drawingml/2006/main"/>
+          <a:p xmlns:a="http://schemas.openxmlformats.org/drawingml/2006/main">
+            <a:pPr algn="l">
+              <a:defRPr sz="1350" b="0">
+                <a:solidFill>
+                  <a:srgbClr val="17253A"/>
+                </a:solidFill>
+                <a:latin typeface="Arial"/>
+                <a:ea typeface="Arial"/>
+                <a:cs typeface="Arial"/>
+              </a:defRPr>
+            </a:pPr>
+            <a:r>
+              <a:rPr sz="1350" b="0">
+                <a:solidFill>
+                  <a:srgbClr val="17253A"/>
+                </a:solidFill>
+                <a:latin typeface="Arial"/>
+                <a:ea typeface="Arial"/>
+                <a:cs typeface="Arial"/>
+              </a:rPr>
+              <a:t>24 times table: 24, 48, 72, 96, 120, 144, 168, 192, 216</a:t>
+            </a:r>
+          </a:p>
+        </p:txBody>
+      </p:sp>
+      <p:sp>
+        <p:nvSpPr>
+          <p:cNvPr id="14" name="">
+            <a:extLst xmlns:a="http://schemas.openxmlformats.org/drawingml/2006/main">
+              <a:ext uri="{FF2B5EF4-FFF2-40B4-BE49-F238E27FC236}">
+                <a16:creationId xmlns:a16="http://schemas.microsoft.com/office/drawing/2014/main" id="{6D1A49CB-14C9-4B3B-91FF-983AE09C456C}"/>
+              </a:ext>
+            </a:extLst>
+          </p:cNvPr>
+          <p:cNvSpPr>
+            <a:spLocks xmlns:a="http://schemas.openxmlformats.org/drawingml/2006/main" noGrp="1"/>
+          </p:cNvSpPr>
+          <p:nvPr/>
+        </p:nvSpPr>
+        <p:spPr>
+          <a:xfrm xmlns:a="http://schemas.openxmlformats.org/drawingml/2006/main">
+            <a:off x="1714500" y="2647950"/>
+            <a:ext cx="9334500" cy="9525"/>
+          </a:xfrm>
+          <a:prstGeom xmlns:a="http://schemas.openxmlformats.org/drawingml/2006/main" prst="rect">
+            <a:avLst/>
+          </a:prstGeom>
+          <a:solidFill xmlns:a="http://schemas.openxmlformats.org/drawingml/2006/main">
+            <a:srgbClr val="D9E0E6"/>
+          </a:solidFill>
+          <a:ln xmlns:a="http://schemas.openxmlformats.org/drawingml/2006/main" w="0">
             <a:solidFill>
               <a:srgbClr val="D9E0E6"/>
             </a:solidFill>
@@ -8298,22 +8442,22 @@
       </p:sp>
       <p:sp>
         <p:nvSpPr>
-          <p:cNvPr id="12" name="">
-            <a:extLst xmlns:a="http://schemas.openxmlformats.org/drawingml/2006/main">
-              <a:ext uri="{FF2B5EF4-FFF2-40B4-BE49-F238E27FC236}">
-                <a16:creationId xmlns:a16="http://schemas.microsoft.com/office/drawing/2014/main" id="{B84F5320-0F6F-4F57-A841-05154199A823}"/>
-              </a:ext>
-            </a:extLst>
-          </p:cNvPr>
-          <p:cNvSpPr>
-            <a:spLocks xmlns:a="http://schemas.openxmlformats.org/drawingml/2006/main" noGrp="1"/>
-          </p:cNvSpPr>
-          <p:nvPr/>
-        </p:nvSpPr>
-        <p:spPr>
-          <a:xfrm xmlns:a="http://schemas.openxmlformats.org/drawingml/2006/main">
-            <a:off x="933450" y="2400300"/>
-            <a:ext cx="3390900" cy="323850"/>
+          <p:cNvPr id="15" name="">
+            <a:extLst xmlns:a="http://schemas.openxmlformats.org/drawingml/2006/main">
+              <a:ext uri="{FF2B5EF4-FFF2-40B4-BE49-F238E27FC236}">
+                <a16:creationId xmlns:a16="http://schemas.microsoft.com/office/drawing/2014/main" id="{580C7EF4-14A5-4D16-92D7-108486F06310}"/>
+              </a:ext>
+            </a:extLst>
+          </p:cNvPr>
+          <p:cNvSpPr>
+            <a:spLocks xmlns:a="http://schemas.openxmlformats.org/drawingml/2006/main" noGrp="1"/>
+          </p:cNvSpPr>
+          <p:nvPr/>
+        </p:nvSpPr>
+        <p:spPr>
+          <a:xfrm xmlns:a="http://schemas.openxmlformats.org/drawingml/2006/main">
+            <a:off x="1162050" y="2781300"/>
+            <a:ext cx="400050" cy="400050"/>
           </a:xfrm>
           <a:prstGeom xmlns:a="http://schemas.openxmlformats.org/drawingml/2006/main" prst="rect">
             <a:avLst/>
@@ -8330,7 +8474,7 @@
           <a:lstStyle xmlns:a="http://schemas.openxmlformats.org/drawingml/2006/main"/>
           <a:p xmlns:a="http://schemas.openxmlformats.org/drawingml/2006/main">
             <a:pPr algn="ctr">
-              <a:defRPr sz="1350" b="1">
+              <a:defRPr sz="1125" b="1">
                 <a:solidFill>
                   <a:srgbClr val="2C6E73"/>
                 </a:solidFill>
@@ -8340,7 +8484,7 @@
               </a:defRPr>
             </a:pPr>
             <a:r>
-              <a:rPr sz="1350" b="1">
+              <a:rPr sz="1125" b="1">
                 <a:solidFill>
                   <a:srgbClr val="2C6E73"/>
                 </a:solidFill>
@@ -8348,29 +8492,29 @@
                 <a:ea typeface="Arial"/>
                 <a:cs typeface="Arial"/>
               </a:rPr>
-              <a:t>Useful multiples</a:t>
-            </a:r>
-          </a:p>
-        </p:txBody>
-      </p:sp>
-      <p:sp>
-        <p:nvSpPr>
-          <p:cNvPr id="13" name="">
-            <a:extLst xmlns:a="http://schemas.openxmlformats.org/drawingml/2006/main">
-              <a:ext uri="{FF2B5EF4-FFF2-40B4-BE49-F238E27FC236}">
-                <a16:creationId xmlns:a16="http://schemas.microsoft.com/office/drawing/2014/main" id="{93CE1B1B-8FFC-4847-AC55-D82BFEAEDECF}"/>
-              </a:ext>
-            </a:extLst>
-          </p:cNvPr>
-          <p:cNvSpPr>
-            <a:spLocks xmlns:a="http://schemas.openxmlformats.org/drawingml/2006/main" noGrp="1"/>
-          </p:cNvSpPr>
-          <p:nvPr/>
-        </p:nvSpPr>
-        <p:spPr>
-          <a:xfrm xmlns:a="http://schemas.openxmlformats.org/drawingml/2006/main">
-            <a:off x="914400" y="2952750"/>
-            <a:ext cx="3448050" cy="514350"/>
+              <a:t>2</a:t>
+            </a:r>
+          </a:p>
+        </p:txBody>
+      </p:sp>
+      <p:sp>
+        <p:nvSpPr>
+          <p:cNvPr id="16" name="">
+            <a:extLst xmlns:a="http://schemas.openxmlformats.org/drawingml/2006/main">
+              <a:ext uri="{FF2B5EF4-FFF2-40B4-BE49-F238E27FC236}">
+                <a16:creationId xmlns:a16="http://schemas.microsoft.com/office/drawing/2014/main" id="{3D61BDBA-986E-4539-8BF3-1556F44C4AF0}"/>
+              </a:ext>
+            </a:extLst>
+          </p:cNvPr>
+          <p:cNvSpPr>
+            <a:spLocks xmlns:a="http://schemas.openxmlformats.org/drawingml/2006/main" noGrp="1"/>
+          </p:cNvSpPr>
+          <p:nvPr/>
+        </p:nvSpPr>
+        <p:spPr>
+          <a:xfrm xmlns:a="http://schemas.openxmlformats.org/drawingml/2006/main">
+            <a:off x="1714500" y="2695575"/>
+            <a:ext cx="9525000" cy="514350"/>
           </a:xfrm>
           <a:prstGeom xmlns:a="http://schemas.openxmlformats.org/drawingml/2006/main" prst="rect">
             <a:avLst/>
@@ -8386,8 +8530,8 @@
           </a:bodyPr>
           <a:lstStyle xmlns:a="http://schemas.openxmlformats.org/drawingml/2006/main"/>
           <a:p xmlns:a="http://schemas.openxmlformats.org/drawingml/2006/main">
-            <a:pPr algn="ctr">
-              <a:defRPr sz="1275" b="1">
+            <a:pPr algn="l">
+              <a:defRPr sz="1350" b="0">
                 <a:solidFill>
                   <a:srgbClr val="17253A"/>
                 </a:solidFill>
@@ -8397,7 +8541,7 @@
               </a:defRPr>
             </a:pPr>
             <a:r>
-              <a:rPr sz="1275" b="1">
+              <a:rPr sz="1350" b="0">
                 <a:solidFill>
                   <a:srgbClr val="17253A"/>
                 </a:solidFill>
@@ -8405,29 +8549,61 @@
                 <a:ea typeface="Arial"/>
                 <a:cs typeface="Arial"/>
               </a:rPr>
-              <a:t>1 × 24 = 24     2 × 24 = 48     3 × 24 = 72</a:t>
-            </a:r>
-          </a:p>
-        </p:txBody>
-      </p:sp>
-      <p:sp>
-        <p:nvSpPr>
-          <p:cNvPr id="14" name="">
-            <a:extLst xmlns:a="http://schemas.openxmlformats.org/drawingml/2006/main">
-              <a:ext uri="{FF2B5EF4-FFF2-40B4-BE49-F238E27FC236}">
-                <a16:creationId xmlns:a16="http://schemas.microsoft.com/office/drawing/2014/main" id="{E6E37A33-05AA-4D0A-8219-EB382AA08915}"/>
-              </a:ext>
-            </a:extLst>
-          </p:cNvPr>
-          <p:cNvSpPr>
-            <a:spLocks xmlns:a="http://schemas.openxmlformats.org/drawingml/2006/main" noGrp="1"/>
-          </p:cNvSpPr>
-          <p:nvPr/>
-        </p:nvSpPr>
-        <p:spPr>
-          <a:xfrm xmlns:a="http://schemas.openxmlformats.org/drawingml/2006/main">
-            <a:off x="914400" y="3695700"/>
-            <a:ext cx="3448050" cy="514350"/>
+              <a:t>73 ÷ 24: choose 72 = 24 × 3; write 3</a:t>
+            </a:r>
+          </a:p>
+        </p:txBody>
+      </p:sp>
+      <p:sp>
+        <p:nvSpPr>
+          <p:cNvPr id="17" name="">
+            <a:extLst xmlns:a="http://schemas.openxmlformats.org/drawingml/2006/main">
+              <a:ext uri="{FF2B5EF4-FFF2-40B4-BE49-F238E27FC236}">
+                <a16:creationId xmlns:a16="http://schemas.microsoft.com/office/drawing/2014/main" id="{A18AF341-BE93-40BB-A406-39E98FAA5EF3}"/>
+              </a:ext>
+            </a:extLst>
+          </p:cNvPr>
+          <p:cNvSpPr>
+            <a:spLocks xmlns:a="http://schemas.openxmlformats.org/drawingml/2006/main" noGrp="1"/>
+          </p:cNvSpPr>
+          <p:nvPr/>
+        </p:nvSpPr>
+        <p:spPr>
+          <a:xfrm xmlns:a="http://schemas.openxmlformats.org/drawingml/2006/main">
+            <a:off x="1714500" y="3228975"/>
+            <a:ext cx="9334500" cy="9525"/>
+          </a:xfrm>
+          <a:prstGeom xmlns:a="http://schemas.openxmlformats.org/drawingml/2006/main" prst="rect">
+            <a:avLst/>
+          </a:prstGeom>
+          <a:solidFill xmlns:a="http://schemas.openxmlformats.org/drawingml/2006/main">
+            <a:srgbClr val="D9E0E6"/>
+          </a:solidFill>
+          <a:ln xmlns:a="http://schemas.openxmlformats.org/drawingml/2006/main" w="0">
+            <a:solidFill>
+              <a:srgbClr val="D9E0E6"/>
+            </a:solidFill>
+          </a:ln>
+        </p:spPr>
+      </p:sp>
+      <p:sp>
+        <p:nvSpPr>
+          <p:cNvPr id="18" name="">
+            <a:extLst xmlns:a="http://schemas.openxmlformats.org/drawingml/2006/main">
+              <a:ext uri="{FF2B5EF4-FFF2-40B4-BE49-F238E27FC236}">
+                <a16:creationId xmlns:a16="http://schemas.microsoft.com/office/drawing/2014/main" id="{214E1CD2-6371-4710-89F7-1C3FCD912ECB}"/>
+              </a:ext>
+            </a:extLst>
+          </p:cNvPr>
+          <p:cNvSpPr>
+            <a:spLocks xmlns:a="http://schemas.openxmlformats.org/drawingml/2006/main" noGrp="1"/>
+          </p:cNvSpPr>
+          <p:nvPr/>
+        </p:nvSpPr>
+        <p:spPr>
+          <a:xfrm xmlns:a="http://schemas.openxmlformats.org/drawingml/2006/main">
+            <a:off x="1162050" y="3362325"/>
+            <a:ext cx="400050" cy="400050"/>
           </a:xfrm>
           <a:prstGeom xmlns:a="http://schemas.openxmlformats.org/drawingml/2006/main" prst="rect">
             <a:avLst/>
@@ -8444,9 +8620,9 @@
           <a:lstStyle xmlns:a="http://schemas.openxmlformats.org/drawingml/2006/main"/>
           <a:p xmlns:a="http://schemas.openxmlformats.org/drawingml/2006/main">
             <a:pPr algn="ctr">
-              <a:defRPr sz="1275" b="1">
-                <a:solidFill>
-                  <a:srgbClr val="17253A"/>
+              <a:defRPr sz="1125" b="1">
+                <a:solidFill>
+                  <a:srgbClr val="2C6E73"/>
                 </a:solidFill>
                 <a:latin typeface="Arial"/>
                 <a:ea typeface="Arial"/>
@@ -8454,37 +8630,37 @@
               </a:defRPr>
             </a:pPr>
             <a:r>
-              <a:rPr sz="1275" b="1">
-                <a:solidFill>
-                  <a:srgbClr val="17253A"/>
+              <a:rPr sz="1125" b="1">
+                <a:solidFill>
+                  <a:srgbClr val="2C6E73"/>
                 </a:solidFill>
                 <a:latin typeface="Arial"/>
                 <a:ea typeface="Arial"/>
                 <a:cs typeface="Arial"/>
               </a:rPr>
-              <a:t>4 × 24 = 96     5 × 24 = 120     6 × 24 = 144</a:t>
-            </a:r>
-          </a:p>
-        </p:txBody>
-      </p:sp>
-      <p:sp>
-        <p:nvSpPr>
-          <p:cNvPr id="15" name="">
-            <a:extLst xmlns:a="http://schemas.openxmlformats.org/drawingml/2006/main">
-              <a:ext uri="{FF2B5EF4-FFF2-40B4-BE49-F238E27FC236}">
-                <a16:creationId xmlns:a16="http://schemas.microsoft.com/office/drawing/2014/main" id="{3D313C56-4899-41B7-B3AA-936A0D9236A4}"/>
-              </a:ext>
-            </a:extLst>
-          </p:cNvPr>
-          <p:cNvSpPr>
-            <a:spLocks xmlns:a="http://schemas.openxmlformats.org/drawingml/2006/main" noGrp="1"/>
-          </p:cNvSpPr>
-          <p:nvPr/>
-        </p:nvSpPr>
-        <p:spPr>
-          <a:xfrm xmlns:a="http://schemas.openxmlformats.org/drawingml/2006/main">
-            <a:off x="914400" y="4438650"/>
-            <a:ext cx="3448050" cy="514350"/>
+              <a:t>3</a:t>
+            </a:r>
+          </a:p>
+        </p:txBody>
+      </p:sp>
+      <p:sp>
+        <p:nvSpPr>
+          <p:cNvPr id="19" name="">
+            <a:extLst xmlns:a="http://schemas.openxmlformats.org/drawingml/2006/main">
+              <a:ext uri="{FF2B5EF4-FFF2-40B4-BE49-F238E27FC236}">
+                <a16:creationId xmlns:a16="http://schemas.microsoft.com/office/drawing/2014/main" id="{8518A1A5-7544-44D4-B2B0-C38B239D6A59}"/>
+              </a:ext>
+            </a:extLst>
+          </p:cNvPr>
+          <p:cNvSpPr>
+            <a:spLocks xmlns:a="http://schemas.openxmlformats.org/drawingml/2006/main" noGrp="1"/>
+          </p:cNvSpPr>
+          <p:nvPr/>
+        </p:nvSpPr>
+        <p:spPr>
+          <a:xfrm xmlns:a="http://schemas.openxmlformats.org/drawingml/2006/main">
+            <a:off x="1714500" y="3276600"/>
+            <a:ext cx="9525000" cy="514350"/>
           </a:xfrm>
           <a:prstGeom xmlns:a="http://schemas.openxmlformats.org/drawingml/2006/main" prst="rect">
             <a:avLst/>
@@ -8500,8 +8676,8 @@
           </a:bodyPr>
           <a:lstStyle xmlns:a="http://schemas.openxmlformats.org/drawingml/2006/main"/>
           <a:p xmlns:a="http://schemas.openxmlformats.org/drawingml/2006/main">
-            <a:pPr algn="ctr">
-              <a:defRPr sz="1275" b="1">
+            <a:pPr algn="l">
+              <a:defRPr sz="1350" b="0">
                 <a:solidFill>
                   <a:srgbClr val="17253A"/>
                 </a:solidFill>
@@ -8511,7 +8687,7 @@
               </a:defRPr>
             </a:pPr>
             <a:r>
-              <a:rPr sz="1275" b="1">
+              <a:rPr sz="1350" b="0">
                 <a:solidFill>
                   <a:srgbClr val="17253A"/>
                 </a:solidFill>
@@ -8519,39 +8695,37 @@
                 <a:ea typeface="Arial"/>
                 <a:cs typeface="Arial"/>
               </a:rPr>
-              <a:t>7 × 24 = 168     8 × 24 = 192     9 × 24 = 216</a:t>
-            </a:r>
-          </a:p>
-        </p:txBody>
-      </p:sp>
-      <p:sp>
-        <p:nvSpPr>
-          <p:cNvPr id="16" name="">
-            <a:extLst xmlns:a="http://schemas.openxmlformats.org/drawingml/2006/main">
-              <a:ext uri="{FF2B5EF4-FFF2-40B4-BE49-F238E27FC236}">
-                <a16:creationId xmlns:a16="http://schemas.microsoft.com/office/drawing/2014/main" id="{C168629A-E24A-4424-A990-10DDF8DE37F6}"/>
-              </a:ext>
-            </a:extLst>
-          </p:cNvPr>
-          <p:cNvSpPr>
-            <a:spLocks xmlns:a="http://schemas.openxmlformats.org/drawingml/2006/main" noGrp="1"/>
-          </p:cNvSpPr>
-          <p:nvPr/>
-        </p:nvSpPr>
-        <p:spPr>
-          <a:xfrm xmlns:a="http://schemas.openxmlformats.org/drawingml/2006/main">
-            <a:off x="4857750" y="2247900"/>
-            <a:ext cx="6648450" cy="3333750"/>
-          </a:xfrm>
-          <a:prstGeom xmlns:a="http://schemas.openxmlformats.org/drawingml/2006/main" prst="roundRect">
-            <a:avLst>
-              <a:gd name="adj" fmla="val 2286"/>
-            </a:avLst>
+              <a:t>73 - 72 = 1; bring down 9 → 19; write 0</a:t>
+            </a:r>
+          </a:p>
+        </p:txBody>
+      </p:sp>
+      <p:sp>
+        <p:nvSpPr>
+          <p:cNvPr id="20" name="">
+            <a:extLst xmlns:a="http://schemas.openxmlformats.org/drawingml/2006/main">
+              <a:ext uri="{FF2B5EF4-FFF2-40B4-BE49-F238E27FC236}">
+                <a16:creationId xmlns:a16="http://schemas.microsoft.com/office/drawing/2014/main" id="{51A08B46-3023-4546-B094-E7C710FB0D08}"/>
+              </a:ext>
+            </a:extLst>
+          </p:cNvPr>
+          <p:cNvSpPr>
+            <a:spLocks xmlns:a="http://schemas.openxmlformats.org/drawingml/2006/main" noGrp="1"/>
+          </p:cNvSpPr>
+          <p:nvPr/>
+        </p:nvSpPr>
+        <p:spPr>
+          <a:xfrm xmlns:a="http://schemas.openxmlformats.org/drawingml/2006/main">
+            <a:off x="1714500" y="3810000"/>
+            <a:ext cx="9334500" cy="9525"/>
+          </a:xfrm>
+          <a:prstGeom xmlns:a="http://schemas.openxmlformats.org/drawingml/2006/main" prst="rect">
+            <a:avLst/>
           </a:prstGeom>
           <a:solidFill xmlns:a="http://schemas.openxmlformats.org/drawingml/2006/main">
-            <a:srgbClr val="E7F1F1"/>
+            <a:srgbClr val="D9E0E6"/>
           </a:solidFill>
-          <a:ln xmlns:a="http://schemas.openxmlformats.org/drawingml/2006/main" w="12383">
+          <a:ln xmlns:a="http://schemas.openxmlformats.org/drawingml/2006/main" w="0">
             <a:solidFill>
               <a:srgbClr val="D9E0E6"/>
             </a:solidFill>
@@ -8560,22 +8734,22 @@
       </p:sp>
       <p:sp>
         <p:nvSpPr>
-          <p:cNvPr id="17" name="">
-            <a:extLst xmlns:a="http://schemas.openxmlformats.org/drawingml/2006/main">
-              <a:ext uri="{FF2B5EF4-FFF2-40B4-BE49-F238E27FC236}">
-                <a16:creationId xmlns:a16="http://schemas.microsoft.com/office/drawing/2014/main" id="{73268C35-A35E-4CD9-99C4-B17109504FAA}"/>
-              </a:ext>
-            </a:extLst>
-          </p:cNvPr>
-          <p:cNvSpPr>
-            <a:spLocks xmlns:a="http://schemas.openxmlformats.org/drawingml/2006/main" noGrp="1"/>
-          </p:cNvSpPr>
-          <p:nvPr/>
-        </p:nvSpPr>
-        <p:spPr>
-          <a:xfrm xmlns:a="http://schemas.openxmlformats.org/drawingml/2006/main">
-            <a:off x="5143500" y="2400300"/>
-            <a:ext cx="6096000" cy="590550"/>
+          <p:cNvPr id="21" name="">
+            <a:extLst xmlns:a="http://schemas.openxmlformats.org/drawingml/2006/main">
+              <a:ext uri="{FF2B5EF4-FFF2-40B4-BE49-F238E27FC236}">
+                <a16:creationId xmlns:a16="http://schemas.microsoft.com/office/drawing/2014/main" id="{D5E02E12-D10F-44DC-B7FA-B3394408475E}"/>
+              </a:ext>
+            </a:extLst>
+          </p:cNvPr>
+          <p:cNvSpPr>
+            <a:spLocks xmlns:a="http://schemas.openxmlformats.org/drawingml/2006/main" noGrp="1"/>
+          </p:cNvSpPr>
+          <p:nvPr/>
+        </p:nvSpPr>
+        <p:spPr>
+          <a:xfrm xmlns:a="http://schemas.openxmlformats.org/drawingml/2006/main">
+            <a:off x="1162050" y="3943350"/>
+            <a:ext cx="400050" cy="400050"/>
           </a:xfrm>
           <a:prstGeom xmlns:a="http://schemas.openxmlformats.org/drawingml/2006/main" prst="rect">
             <a:avLst/>
@@ -8591,10 +8765,10 @@
           </a:bodyPr>
           <a:lstStyle xmlns:a="http://schemas.openxmlformats.org/drawingml/2006/main"/>
           <a:p xmlns:a="http://schemas.openxmlformats.org/drawingml/2006/main">
-            <a:pPr algn="l">
-              <a:defRPr sz="1350" b="0">
-                <a:solidFill>
-                  <a:srgbClr val="17253A"/>
+            <a:pPr algn="ctr">
+              <a:defRPr sz="1125" b="1">
+                <a:solidFill>
+                  <a:srgbClr val="2C6E73"/>
                 </a:solidFill>
                 <a:latin typeface="Arial"/>
                 <a:ea typeface="Arial"/>
@@ -8602,37 +8776,37 @@
               </a:defRPr>
             </a:pPr>
             <a:r>
-              <a:rPr sz="1350" b="0">
-                <a:solidFill>
-                  <a:srgbClr val="17253A"/>
+              <a:rPr sz="1125" b="1">
+                <a:solidFill>
+                  <a:srgbClr val="2C6E73"/>
                 </a:solidFill>
                 <a:latin typeface="Arial"/>
                 <a:ea typeface="Arial"/>
                 <a:cs typeface="Arial"/>
               </a:rPr>
-              <a:t>1. 73 ÷ 24 = 3. Write 3; subtract 72; remainder 1. Bring down 9.</a:t>
-            </a:r>
-          </a:p>
-        </p:txBody>
-      </p:sp>
-      <p:sp>
-        <p:nvSpPr>
-          <p:cNvPr id="18" name="">
-            <a:extLst xmlns:a="http://schemas.openxmlformats.org/drawingml/2006/main">
-              <a:ext uri="{FF2B5EF4-FFF2-40B4-BE49-F238E27FC236}">
-                <a16:creationId xmlns:a16="http://schemas.microsoft.com/office/drawing/2014/main" id="{45974615-2038-4D2E-A18D-2E134B97F2B7}"/>
-              </a:ext>
-            </a:extLst>
-          </p:cNvPr>
-          <p:cNvSpPr>
-            <a:spLocks xmlns:a="http://schemas.openxmlformats.org/drawingml/2006/main" noGrp="1"/>
-          </p:cNvSpPr>
-          <p:nvPr/>
-        </p:nvSpPr>
-        <p:spPr>
-          <a:xfrm xmlns:a="http://schemas.openxmlformats.org/drawingml/2006/main">
-            <a:off x="5143500" y="3133725"/>
-            <a:ext cx="6096000" cy="590550"/>
+              <a:t>4</a:t>
+            </a:r>
+          </a:p>
+        </p:txBody>
+      </p:sp>
+      <p:sp>
+        <p:nvSpPr>
+          <p:cNvPr id="22" name="">
+            <a:extLst xmlns:a="http://schemas.openxmlformats.org/drawingml/2006/main">
+              <a:ext uri="{FF2B5EF4-FFF2-40B4-BE49-F238E27FC236}">
+                <a16:creationId xmlns:a16="http://schemas.microsoft.com/office/drawing/2014/main" id="{7BE6063A-D368-4E80-B49E-3AFBAB229B65}"/>
+              </a:ext>
+            </a:extLst>
+          </p:cNvPr>
+          <p:cNvSpPr>
+            <a:spLocks xmlns:a="http://schemas.openxmlformats.org/drawingml/2006/main" noGrp="1"/>
+          </p:cNvSpPr>
+          <p:nvPr/>
+        </p:nvSpPr>
+        <p:spPr>
+          <a:xfrm xmlns:a="http://schemas.openxmlformats.org/drawingml/2006/main">
+            <a:off x="1714500" y="3857625"/>
+            <a:ext cx="9525000" cy="514350"/>
           </a:xfrm>
           <a:prstGeom xmlns:a="http://schemas.openxmlformats.org/drawingml/2006/main" prst="rect">
             <a:avLst/>
@@ -8667,29 +8841,61 @@
                 <a:ea typeface="Arial"/>
                 <a:cs typeface="Arial"/>
               </a:rPr>
-              <a:t>2. 19 ÷ 24 = 0. Write 0; subtract 0; remainder 19. Bring down 2.</a:t>
-            </a:r>
-          </a:p>
-        </p:txBody>
-      </p:sp>
-      <p:sp>
-        <p:nvSpPr>
-          <p:cNvPr id="19" name="">
-            <a:extLst xmlns:a="http://schemas.openxmlformats.org/drawingml/2006/main">
-              <a:ext uri="{FF2B5EF4-FFF2-40B4-BE49-F238E27FC236}">
-                <a16:creationId xmlns:a16="http://schemas.microsoft.com/office/drawing/2014/main" id="{954A18EB-6BE8-431E-A018-575FC1D0106A}"/>
-              </a:ext>
-            </a:extLst>
-          </p:cNvPr>
-          <p:cNvSpPr>
-            <a:spLocks xmlns:a="http://schemas.openxmlformats.org/drawingml/2006/main" noGrp="1"/>
-          </p:cNvSpPr>
-          <p:nvPr/>
-        </p:nvSpPr>
-        <p:spPr>
-          <a:xfrm xmlns:a="http://schemas.openxmlformats.org/drawingml/2006/main">
-            <a:off x="5143500" y="3867150"/>
-            <a:ext cx="6096000" cy="590550"/>
+              <a:t>Bring down 2 → 192; choose 192 = 24 × 8; write 8</a:t>
+            </a:r>
+          </a:p>
+        </p:txBody>
+      </p:sp>
+      <p:sp>
+        <p:nvSpPr>
+          <p:cNvPr id="23" name="">
+            <a:extLst xmlns:a="http://schemas.openxmlformats.org/drawingml/2006/main">
+              <a:ext uri="{FF2B5EF4-FFF2-40B4-BE49-F238E27FC236}">
+                <a16:creationId xmlns:a16="http://schemas.microsoft.com/office/drawing/2014/main" id="{2E2E3357-403C-4C61-A69D-62E048304720}"/>
+              </a:ext>
+            </a:extLst>
+          </p:cNvPr>
+          <p:cNvSpPr>
+            <a:spLocks xmlns:a="http://schemas.openxmlformats.org/drawingml/2006/main" noGrp="1"/>
+          </p:cNvSpPr>
+          <p:nvPr/>
+        </p:nvSpPr>
+        <p:spPr>
+          <a:xfrm xmlns:a="http://schemas.openxmlformats.org/drawingml/2006/main">
+            <a:off x="1714500" y="4391025"/>
+            <a:ext cx="9334500" cy="9525"/>
+          </a:xfrm>
+          <a:prstGeom xmlns:a="http://schemas.openxmlformats.org/drawingml/2006/main" prst="rect">
+            <a:avLst/>
+          </a:prstGeom>
+          <a:solidFill xmlns:a="http://schemas.openxmlformats.org/drawingml/2006/main">
+            <a:srgbClr val="D9E0E6"/>
+          </a:solidFill>
+          <a:ln xmlns:a="http://schemas.openxmlformats.org/drawingml/2006/main" w="0">
+            <a:solidFill>
+              <a:srgbClr val="D9E0E6"/>
+            </a:solidFill>
+          </a:ln>
+        </p:spPr>
+      </p:sp>
+      <p:sp>
+        <p:nvSpPr>
+          <p:cNvPr id="24" name="">
+            <a:extLst xmlns:a="http://schemas.openxmlformats.org/drawingml/2006/main">
+              <a:ext uri="{FF2B5EF4-FFF2-40B4-BE49-F238E27FC236}">
+                <a16:creationId xmlns:a16="http://schemas.microsoft.com/office/drawing/2014/main" id="{7096A8EE-9152-4121-9D73-DC3952AA26E6}"/>
+              </a:ext>
+            </a:extLst>
+          </p:cNvPr>
+          <p:cNvSpPr>
+            <a:spLocks xmlns:a="http://schemas.openxmlformats.org/drawingml/2006/main" noGrp="1"/>
+          </p:cNvSpPr>
+          <p:nvPr/>
+        </p:nvSpPr>
+        <p:spPr>
+          <a:xfrm xmlns:a="http://schemas.openxmlformats.org/drawingml/2006/main">
+            <a:off x="1162050" y="4524375"/>
+            <a:ext cx="400050" cy="400050"/>
           </a:xfrm>
           <a:prstGeom xmlns:a="http://schemas.openxmlformats.org/drawingml/2006/main" prst="rect">
             <a:avLst/>
@@ -8705,10 +8911,10 @@
           </a:bodyPr>
           <a:lstStyle xmlns:a="http://schemas.openxmlformats.org/drawingml/2006/main"/>
           <a:p xmlns:a="http://schemas.openxmlformats.org/drawingml/2006/main">
-            <a:pPr algn="l">
-              <a:defRPr sz="1350" b="0">
-                <a:solidFill>
-                  <a:srgbClr val="17253A"/>
+            <a:pPr algn="ctr">
+              <a:defRPr sz="1125" b="1">
+                <a:solidFill>
+                  <a:srgbClr val="2C6E73"/>
                 </a:solidFill>
                 <a:latin typeface="Arial"/>
                 <a:ea typeface="Arial"/>
@@ -8716,37 +8922,37 @@
               </a:defRPr>
             </a:pPr>
             <a:r>
-              <a:rPr sz="1350" b="0">
-                <a:solidFill>
-                  <a:srgbClr val="17253A"/>
+              <a:rPr sz="1125" b="1">
+                <a:solidFill>
+                  <a:srgbClr val="2C6E73"/>
                 </a:solidFill>
                 <a:latin typeface="Arial"/>
                 <a:ea typeface="Arial"/>
                 <a:cs typeface="Arial"/>
               </a:rPr>
-              <a:t>3. 192 ÷ 24 = 8. Write 8; subtract 192; remainder 0.</a:t>
-            </a:r>
-          </a:p>
-        </p:txBody>
-      </p:sp>
-      <p:sp>
-        <p:nvSpPr>
-          <p:cNvPr id="20" name="">
-            <a:extLst xmlns:a="http://schemas.openxmlformats.org/drawingml/2006/main">
-              <a:ext uri="{FF2B5EF4-FFF2-40B4-BE49-F238E27FC236}">
-                <a16:creationId xmlns:a16="http://schemas.microsoft.com/office/drawing/2014/main" id="{4295C636-DD6F-4966-80D9-2FB09383F526}"/>
-              </a:ext>
-            </a:extLst>
-          </p:cNvPr>
-          <p:cNvSpPr>
-            <a:spLocks xmlns:a="http://schemas.openxmlformats.org/drawingml/2006/main" noGrp="1"/>
-          </p:cNvSpPr>
-          <p:nvPr/>
-        </p:nvSpPr>
-        <p:spPr>
-          <a:xfrm xmlns:a="http://schemas.openxmlformats.org/drawingml/2006/main">
-            <a:off x="5143500" y="4600575"/>
-            <a:ext cx="6096000" cy="590550"/>
+              <a:t>5</a:t>
+            </a:r>
+          </a:p>
+        </p:txBody>
+      </p:sp>
+      <p:sp>
+        <p:nvSpPr>
+          <p:cNvPr id="25" name="">
+            <a:extLst xmlns:a="http://schemas.openxmlformats.org/drawingml/2006/main">
+              <a:ext uri="{FF2B5EF4-FFF2-40B4-BE49-F238E27FC236}">
+                <a16:creationId xmlns:a16="http://schemas.microsoft.com/office/drawing/2014/main" id="{B5E7BB30-3D55-457C-9E7F-3D4B1B01D9BB}"/>
+              </a:ext>
+            </a:extLst>
+          </p:cNvPr>
+          <p:cNvSpPr>
+            <a:spLocks xmlns:a="http://schemas.openxmlformats.org/drawingml/2006/main" noGrp="1"/>
+          </p:cNvSpPr>
+          <p:nvPr/>
+        </p:nvSpPr>
+        <p:spPr>
+          <a:xfrm xmlns:a="http://schemas.openxmlformats.org/drawingml/2006/main">
+            <a:off x="1714500" y="4438650"/>
+            <a:ext cx="9525000" cy="514350"/>
           </a:xfrm>
           <a:prstGeom xmlns:a="http://schemas.openxmlformats.org/drawingml/2006/main" prst="rect">
             <a:avLst/>
@@ -8763,9 +8969,9 @@
           <a:lstStyle xmlns:a="http://schemas.openxmlformats.org/drawingml/2006/main"/>
           <a:p xmlns:a="http://schemas.openxmlformats.org/drawingml/2006/main">
             <a:pPr algn="l">
-              <a:defRPr sz="1350" b="1">
-                <a:solidFill>
-                  <a:srgbClr val="2F785D"/>
+              <a:defRPr sz="1350" b="0">
+                <a:solidFill>
+                  <a:srgbClr val="17253A"/>
                 </a:solidFill>
                 <a:latin typeface="Arial"/>
                 <a:ea typeface="Arial"/>
@@ -8773,6 +8979,152 @@
               </a:defRPr>
             </a:pPr>
             <a:r>
+              <a:rPr sz="1350" b="0">
+                <a:solidFill>
+                  <a:srgbClr val="17253A"/>
+                </a:solidFill>
+                <a:latin typeface="Arial"/>
+                <a:ea typeface="Arial"/>
+                <a:cs typeface="Arial"/>
+              </a:rPr>
+              <a:t>Quotient = 308</a:t>
+            </a:r>
+          </a:p>
+        </p:txBody>
+      </p:sp>
+      <p:sp>
+        <p:nvSpPr>
+          <p:cNvPr id="26" name="">
+            <a:extLst xmlns:a="http://schemas.openxmlformats.org/drawingml/2006/main">
+              <a:ext uri="{FF2B5EF4-FFF2-40B4-BE49-F238E27FC236}">
+                <a16:creationId xmlns:a16="http://schemas.microsoft.com/office/drawing/2014/main" id="{C3756CA1-0556-42B4-B1A8-7CE9FCF612BE}"/>
+              </a:ext>
+            </a:extLst>
+          </p:cNvPr>
+          <p:cNvSpPr>
+            <a:spLocks xmlns:a="http://schemas.openxmlformats.org/drawingml/2006/main" noGrp="1"/>
+          </p:cNvSpPr>
+          <p:nvPr/>
+        </p:nvSpPr>
+        <p:spPr>
+          <a:xfrm xmlns:a="http://schemas.openxmlformats.org/drawingml/2006/main">
+            <a:off x="1714500" y="4972050"/>
+            <a:ext cx="9334500" cy="9525"/>
+          </a:xfrm>
+          <a:prstGeom xmlns:a="http://schemas.openxmlformats.org/drawingml/2006/main" prst="rect">
+            <a:avLst/>
+          </a:prstGeom>
+          <a:solidFill xmlns:a="http://schemas.openxmlformats.org/drawingml/2006/main">
+            <a:srgbClr val="D9E0E6"/>
+          </a:solidFill>
+          <a:ln xmlns:a="http://schemas.openxmlformats.org/drawingml/2006/main" w="0">
+            <a:solidFill>
+              <a:srgbClr val="D9E0E6"/>
+            </a:solidFill>
+          </a:ln>
+        </p:spPr>
+      </p:sp>
+      <p:sp>
+        <p:nvSpPr>
+          <p:cNvPr id="27" name="">
+            <a:extLst xmlns:a="http://schemas.openxmlformats.org/drawingml/2006/main">
+              <a:ext uri="{FF2B5EF4-FFF2-40B4-BE49-F238E27FC236}">
+                <a16:creationId xmlns:a16="http://schemas.microsoft.com/office/drawing/2014/main" id="{FD922D90-CDE0-4FE2-B5FA-8670368E33E4}"/>
+              </a:ext>
+            </a:extLst>
+          </p:cNvPr>
+          <p:cNvSpPr>
+            <a:spLocks xmlns:a="http://schemas.openxmlformats.org/drawingml/2006/main" noGrp="1"/>
+          </p:cNvSpPr>
+          <p:nvPr/>
+        </p:nvSpPr>
+        <p:spPr>
+          <a:xfrm xmlns:a="http://schemas.openxmlformats.org/drawingml/2006/main">
+            <a:off x="1162050" y="5105400"/>
+            <a:ext cx="400050" cy="400050"/>
+          </a:xfrm>
+          <a:prstGeom xmlns:a="http://schemas.openxmlformats.org/drawingml/2006/main" prst="rect">
+            <a:avLst/>
+          </a:prstGeom>
+          <a:noFill xmlns:a="http://schemas.openxmlformats.org/drawingml/2006/main"/>
+          <a:ln xmlns:a="http://schemas.openxmlformats.org/drawingml/2006/main" w="0">
+            <a:noFill/>
+          </a:ln>
+        </p:spPr>
+        <p:txBody>
+          <a:bodyPr xmlns:a="http://schemas.openxmlformats.org/drawingml/2006/main" anchor="ctr">
+            <a:normAutofit fontScale="100000"/>
+          </a:bodyPr>
+          <a:lstStyle xmlns:a="http://schemas.openxmlformats.org/drawingml/2006/main"/>
+          <a:p xmlns:a="http://schemas.openxmlformats.org/drawingml/2006/main">
+            <a:pPr algn="ctr">
+              <a:defRPr sz="1125" b="1">
+                <a:solidFill>
+                  <a:srgbClr val="2F785D"/>
+                </a:solidFill>
+                <a:latin typeface="Arial"/>
+                <a:ea typeface="Arial"/>
+                <a:cs typeface="Arial"/>
+              </a:defRPr>
+            </a:pPr>
+            <a:r>
+              <a:rPr sz="1125" b="1">
+                <a:solidFill>
+                  <a:srgbClr val="2F785D"/>
+                </a:solidFill>
+                <a:latin typeface="Arial"/>
+                <a:ea typeface="Arial"/>
+                <a:cs typeface="Arial"/>
+              </a:rPr>
+              <a:t>6</a:t>
+            </a:r>
+          </a:p>
+        </p:txBody>
+      </p:sp>
+      <p:sp>
+        <p:nvSpPr>
+          <p:cNvPr id="28" name="">
+            <a:extLst xmlns:a="http://schemas.openxmlformats.org/drawingml/2006/main">
+              <a:ext uri="{FF2B5EF4-FFF2-40B4-BE49-F238E27FC236}">
+                <a16:creationId xmlns:a16="http://schemas.microsoft.com/office/drawing/2014/main" id="{167D1AA5-7361-4733-9B64-4E6D06427037}"/>
+              </a:ext>
+            </a:extLst>
+          </p:cNvPr>
+          <p:cNvSpPr>
+            <a:spLocks xmlns:a="http://schemas.openxmlformats.org/drawingml/2006/main" noGrp="1"/>
+          </p:cNvSpPr>
+          <p:nvPr/>
+        </p:nvSpPr>
+        <p:spPr>
+          <a:xfrm xmlns:a="http://schemas.openxmlformats.org/drawingml/2006/main">
+            <a:off x="1714500" y="5019675"/>
+            <a:ext cx="9525000" cy="514350"/>
+          </a:xfrm>
+          <a:prstGeom xmlns:a="http://schemas.openxmlformats.org/drawingml/2006/main" prst="rect">
+            <a:avLst/>
+          </a:prstGeom>
+          <a:noFill xmlns:a="http://schemas.openxmlformats.org/drawingml/2006/main"/>
+          <a:ln xmlns:a="http://schemas.openxmlformats.org/drawingml/2006/main" w="0">
+            <a:noFill/>
+          </a:ln>
+        </p:spPr>
+        <p:txBody>
+          <a:bodyPr xmlns:a="http://schemas.openxmlformats.org/drawingml/2006/main" anchor="ctr">
+            <a:normAutofit fontScale="100000"/>
+          </a:bodyPr>
+          <a:lstStyle xmlns:a="http://schemas.openxmlformats.org/drawingml/2006/main"/>
+          <a:p xmlns:a="http://schemas.openxmlformats.org/drawingml/2006/main">
+            <a:pPr algn="l">
+              <a:defRPr sz="1350" b="1">
+                <a:solidFill>
+                  <a:srgbClr val="2F785D"/>
+                </a:solidFill>
+                <a:latin typeface="Arial"/>
+                <a:ea typeface="Arial"/>
+                <a:cs typeface="Arial"/>
+              </a:defRPr>
+            </a:pPr>
+            <a:r>
               <a:rPr sz="1350" b="1">
                 <a:solidFill>
                   <a:srgbClr val="2F785D"/>
@@ -8781,7 +9133,7 @@
                 <a:ea typeface="Arial"/>
                 <a:cs typeface="Arial"/>
               </a:rPr>
-              <a:t>4. Quotient 308. Check: 308 × 24 = 7392.</a:t>
+              <a:t>Check: 308 × 24 = 7,392</a:t>
             </a:r>
           </a:p>
         </p:txBody>
@@ -8789,7 +9141,7 @@
     </p:spTree>
     <p:extLst>
       <p:ext uri="{BB962C8B-B14F-4D97-AF65-F5344CB8AC3E}">
-        <p14:creationId xmlns:p14="http://schemas.microsoft.com/office/powerpoint/2010/main" val="1554046725"/>
+        <p14:creationId xmlns:p14="http://schemas.microsoft.com/office/powerpoint/2010/main" val="2034902808"/>
       </p:ext>
     </p:extLst>
   </p:cSld>
@@ -8917,7 +9269,7 @@
                                           </p:stCondLst>
                                         </p:cTn>
                                         <p:tgtEl>
-                                          <p:spTgt spid="14"/>
+                                          <p:spTgt spid="16"/>
                                         </p:tgtEl>
                                         <p:attrNameLst>
                                           <p:attrName>style.visibility</p:attrName>
@@ -8962,7 +9314,7 @@
                                           </p:stCondLst>
                                         </p:cTn>
                                         <p:tgtEl>
-                                          <p:spTgt spid="15"/>
+                                          <p:spTgt spid="19"/>
                                         </p:tgtEl>
                                         <p:attrNameLst>
                                           <p:attrName>style.visibility</p:attrName>
@@ -9007,7 +9359,7 @@
                                           </p:stCondLst>
                                         </p:cTn>
                                         <p:tgtEl>
-                                          <p:spTgt spid="17"/>
+                                          <p:spTgt spid="22"/>
                                         </p:tgtEl>
                                         <p:attrNameLst>
                                           <p:attrName>style.visibility</p:attrName>
@@ -9052,7 +9404,7 @@
                                           </p:stCondLst>
                                         </p:cTn>
                                         <p:tgtEl>
-                                          <p:spTgt spid="18"/>
+                                          <p:spTgt spid="25"/>
                                         </p:tgtEl>
                                         <p:attrNameLst>
                                           <p:attrName>style.visibility</p:attrName>
@@ -9097,52 +9449,7 @@
                                           </p:stCondLst>
                                         </p:cTn>
                                         <p:tgtEl>
-                                          <p:spTgt spid="19"/>
-                                        </p:tgtEl>
-                                        <p:attrNameLst>
-                                          <p:attrName>style.visibility</p:attrName>
-                                        </p:attrNameLst>
-                                      </p:cBhvr>
-                                      <p:to>
-                                        <p:strVal val="visible"/>
-                                      </p:to>
-                                    </p:set>
-                                  </p:childTnLst>
-                                </p:cTn>
-                              </p:par>
-                            </p:childTnLst>
-                          </p:cTn>
-                        </p:par>
-                      </p:childTnLst>
-                    </p:cTn>
-                  </p:par>
-                  <p:par>
-                    <p:cTn id="31" fill="hold">
-                      <p:stCondLst>
-                        <p:cond delay="indefinite"/>
-                      </p:stCondLst>
-                      <p:childTnLst>
-                        <p:par>
-                          <p:cTn id="32" fill="hold">
-                            <p:stCondLst>
-                              <p:cond delay="0"/>
-                            </p:stCondLst>
-                            <p:childTnLst>
-                              <p:par>
-                                <p:cTn id="33" presetID="1" presetClass="entr" presetSubtype="0" fill="hold" grpId="0" nodeType="clickEffect">
-                                  <p:stCondLst>
-                                    <p:cond delay="0"/>
-                                  </p:stCondLst>
-                                  <p:childTnLst>
-                                    <p:set>
-                                      <p:cBhvr>
-                                        <p:cTn id="34" dur="1" fill="hold">
-                                          <p:stCondLst>
-                                            <p:cond delay="0"/>
-                                          </p:stCondLst>
-                                        </p:cTn>
-                                        <p:tgtEl>
-                                          <p:spTgt spid="20"/>
+                                          <p:spTgt spid="28"/>
                                         </p:tgtEl>
                                         <p:attrNameLst>
                                           <p:attrName>style.visibility</p:attrName>
@@ -9185,12 +9492,11 @@
     <p:bldLst>
       <p:bldP spid="10" grpId="0"/>
       <p:bldP spid="13" grpId="0"/>
-      <p:bldP spid="14" grpId="0"/>
-      <p:bldP spid="15" grpId="0"/>
-      <p:bldP spid="17" grpId="0"/>
-      <p:bldP spid="18" grpId="0"/>
+      <p:bldP spid="16" grpId="0"/>
       <p:bldP spid="19" grpId="0"/>
-      <p:bldP spid="20" grpId="0"/>
+      <p:bldP spid="22" grpId="0"/>
+      <p:bldP spid="25" grpId="0"/>
+      <p:bldP spid="28" grpId="0"/>
     </p:bldLst>
   </p:timing>
 </p:sld>
@@ -9220,7 +9526,7 @@
           <p:cNvPr id="15" name="">
             <a:extLst xmlns:a="http://schemas.openxmlformats.org/drawingml/2006/main">
               <a:ext uri="{FF2B5EF4-FFF2-40B4-BE49-F238E27FC236}">
-                <a16:creationId xmlns:a16="http://schemas.microsoft.com/office/drawing/2014/main" id="{055A1AC5-F9A7-4F38-8980-C1A770E0C288}"/>
+                <a16:creationId xmlns:a16="http://schemas.microsoft.com/office/drawing/2014/main" id="{DBE6B4C1-6CB6-4230-B287-4981317527D1}"/>
               </a:ext>
             </a:extLst>
           </p:cNvPr>
@@ -9252,7 +9558,7 @@
           <p:cNvPr id="2" name="">
             <a:extLst xmlns:a="http://schemas.openxmlformats.org/drawingml/2006/main">
               <a:ext uri="{FF2B5EF4-FFF2-40B4-BE49-F238E27FC236}">
-                <a16:creationId xmlns:a16="http://schemas.microsoft.com/office/drawing/2014/main" id="{EE958C18-2C04-4875-A0F2-F84057E33D86}"/>
+                <a16:creationId xmlns:a16="http://schemas.microsoft.com/office/drawing/2014/main" id="{C63FEF90-6CED-40FB-8C3E-3A056FF391D4}"/>
               </a:ext>
             </a:extLst>
           </p:cNvPr>
@@ -9309,7 +9615,7 @@
           <p:cNvPr id="3" name="">
             <a:extLst xmlns:a="http://schemas.openxmlformats.org/drawingml/2006/main">
               <a:ext uri="{FF2B5EF4-FFF2-40B4-BE49-F238E27FC236}">
-                <a16:creationId xmlns:a16="http://schemas.microsoft.com/office/drawing/2014/main" id="{DA3F5522-92AF-47A2-9B8D-C086C75389AA}"/>
+                <a16:creationId xmlns:a16="http://schemas.microsoft.com/office/drawing/2014/main" id="{3042A57A-8E60-462C-ABFF-45BA1AB17811}"/>
               </a:ext>
             </a:extLst>
           </p:cNvPr>
@@ -9341,7 +9647,7 @@
           <p:cNvPr id="4" name="">
             <a:extLst xmlns:a="http://schemas.openxmlformats.org/drawingml/2006/main">
               <a:ext uri="{FF2B5EF4-FFF2-40B4-BE49-F238E27FC236}">
-                <a16:creationId xmlns:a16="http://schemas.microsoft.com/office/drawing/2014/main" id="{C60696F3-A726-4773-84FA-BD42B2B752E3}"/>
+                <a16:creationId xmlns:a16="http://schemas.microsoft.com/office/drawing/2014/main" id="{A63105C9-2743-491A-8B60-B7AB5E9DE918}"/>
               </a:ext>
             </a:extLst>
           </p:cNvPr>
@@ -9398,7 +9704,7 @@
           <p:cNvPr id="5" name="">
             <a:extLst xmlns:a="http://schemas.openxmlformats.org/drawingml/2006/main">
               <a:ext uri="{FF2B5EF4-FFF2-40B4-BE49-F238E27FC236}">
-                <a16:creationId xmlns:a16="http://schemas.microsoft.com/office/drawing/2014/main" id="{31715441-8042-4DA7-9F29-A408E3F56DE3}"/>
+                <a16:creationId xmlns:a16="http://schemas.microsoft.com/office/drawing/2014/main" id="{8CB210F5-F437-4143-B160-C7678D0A8C59}"/>
               </a:ext>
             </a:extLst>
           </p:cNvPr>
@@ -9455,7 +9761,7 @@
           <p:cNvPr id="6" name="">
             <a:extLst xmlns:a="http://schemas.openxmlformats.org/drawingml/2006/main">
               <a:ext uri="{FF2B5EF4-FFF2-40B4-BE49-F238E27FC236}">
-                <a16:creationId xmlns:a16="http://schemas.microsoft.com/office/drawing/2014/main" id="{D478C4E5-A2A3-450E-BCA6-6082F1B8D91E}"/>
+                <a16:creationId xmlns:a16="http://schemas.microsoft.com/office/drawing/2014/main" id="{CF0A640C-F9AE-4A79-83F1-6B1A28646741}"/>
               </a:ext>
             </a:extLst>
           </p:cNvPr>
@@ -9512,7 +9818,7 @@
           <p:cNvPr id="7" name="">
             <a:extLst xmlns:a="http://schemas.openxmlformats.org/drawingml/2006/main">
               <a:ext uri="{FF2B5EF4-FFF2-40B4-BE49-F238E27FC236}">
-                <a16:creationId xmlns:a16="http://schemas.microsoft.com/office/drawing/2014/main" id="{A650A13A-88D7-4D45-B97E-79C7535EC16F}"/>
+                <a16:creationId xmlns:a16="http://schemas.microsoft.com/office/drawing/2014/main" id="{94B42FA5-32C2-4107-ABC5-C55501908E85}"/>
               </a:ext>
             </a:extLst>
           </p:cNvPr>
@@ -9544,7 +9850,7 @@
           <p:cNvPr id="8" name="">
             <a:extLst xmlns:a="http://schemas.openxmlformats.org/drawingml/2006/main">
               <a:ext uri="{FF2B5EF4-FFF2-40B4-BE49-F238E27FC236}">
-                <a16:creationId xmlns:a16="http://schemas.microsoft.com/office/drawing/2014/main" id="{D7236055-2803-4DB3-9D41-48D5C32C17A6}"/>
+                <a16:creationId xmlns:a16="http://schemas.microsoft.com/office/drawing/2014/main" id="{CB9C9920-7A35-4AC5-B902-284E2B87BC5F}"/>
               </a:ext>
             </a:extLst>
           </p:cNvPr>
@@ -9601,7 +9907,7 @@
           <p:cNvPr id="9" name="">
             <a:extLst xmlns:a="http://schemas.openxmlformats.org/drawingml/2006/main">
               <a:ext uri="{FF2B5EF4-FFF2-40B4-BE49-F238E27FC236}">
-                <a16:creationId xmlns:a16="http://schemas.microsoft.com/office/drawing/2014/main" id="{064A85AA-3E03-46AF-8811-C89CA826DB99}"/>
+                <a16:creationId xmlns:a16="http://schemas.microsoft.com/office/drawing/2014/main" id="{9B540D69-FCB7-49CE-BA8D-4BC87435C84D}"/>
               </a:ext>
             </a:extLst>
           </p:cNvPr>
@@ -9658,7 +9964,7 @@
           <p:cNvPr id="10" name="">
             <a:extLst xmlns:a="http://schemas.openxmlformats.org/drawingml/2006/main">
               <a:ext uri="{FF2B5EF4-FFF2-40B4-BE49-F238E27FC236}">
-                <a16:creationId xmlns:a16="http://schemas.microsoft.com/office/drawing/2014/main" id="{B6B1799B-2E1B-4BD7-A047-39C3D5EE1D12}"/>
+                <a16:creationId xmlns:a16="http://schemas.microsoft.com/office/drawing/2014/main" id="{D93778B8-E99B-411B-A623-90C715648E4A}"/>
               </a:ext>
             </a:extLst>
           </p:cNvPr>
@@ -9715,7 +10021,7 @@
           <p:cNvPr id="11" name="">
             <a:extLst xmlns:a="http://schemas.openxmlformats.org/drawingml/2006/main">
               <a:ext uri="{FF2B5EF4-FFF2-40B4-BE49-F238E27FC236}">
-                <a16:creationId xmlns:a16="http://schemas.microsoft.com/office/drawing/2014/main" id="{DB22AADB-99B7-4BA6-B831-7C181DD6CA87}"/>
+                <a16:creationId xmlns:a16="http://schemas.microsoft.com/office/drawing/2014/main" id="{F3868808-AD0C-4763-B8CF-29781A0B54D0}"/>
               </a:ext>
             </a:extLst>
           </p:cNvPr>
@@ -9772,7 +10078,7 @@
           <p:cNvPr id="12" name="">
             <a:extLst xmlns:a="http://schemas.openxmlformats.org/drawingml/2006/main">
               <a:ext uri="{FF2B5EF4-FFF2-40B4-BE49-F238E27FC236}">
-                <a16:creationId xmlns:a16="http://schemas.microsoft.com/office/drawing/2014/main" id="{9B9CFAC2-9D51-4ECB-8A6B-9D2081C3BC35}"/>
+                <a16:creationId xmlns:a16="http://schemas.microsoft.com/office/drawing/2014/main" id="{4035AEFA-FA0F-4CA1-8833-E7BF0F8753E5}"/>
               </a:ext>
             </a:extLst>
           </p:cNvPr>
@@ -9804,7 +10110,7 @@
           <p:cNvPr id="13" name="">
             <a:extLst xmlns:a="http://schemas.openxmlformats.org/drawingml/2006/main">
               <a:ext uri="{FF2B5EF4-FFF2-40B4-BE49-F238E27FC236}">
-                <a16:creationId xmlns:a16="http://schemas.microsoft.com/office/drawing/2014/main" id="{BB75A611-0B85-445C-A91C-0ED5A68CAF9E}"/>
+                <a16:creationId xmlns:a16="http://schemas.microsoft.com/office/drawing/2014/main" id="{4467CCEC-EE19-4288-9440-DD0D44D67D5A}"/>
               </a:ext>
             </a:extLst>
           </p:cNvPr>
@@ -9861,7 +10167,7 @@
           <p:cNvPr id="14" name="">
             <a:extLst xmlns:a="http://schemas.openxmlformats.org/drawingml/2006/main">
               <a:ext uri="{FF2B5EF4-FFF2-40B4-BE49-F238E27FC236}">
-                <a16:creationId xmlns:a16="http://schemas.microsoft.com/office/drawing/2014/main" id="{A5E86DF2-EF0E-4027-9DC7-A38585E968B2}"/>
+                <a16:creationId xmlns:a16="http://schemas.microsoft.com/office/drawing/2014/main" id="{85F5F42F-8A79-4E4B-ABBD-43E8C23B7199}"/>
               </a:ext>
             </a:extLst>
           </p:cNvPr>
@@ -9916,7 +10222,7 @@
     </p:spTree>
     <p:extLst>
       <p:ext uri="{BB962C8B-B14F-4D97-AF65-F5344CB8AC3E}">
-        <p14:creationId xmlns:p14="http://schemas.microsoft.com/office/powerpoint/2010/main" val="1697559244"/>
+        <p14:creationId xmlns:p14="http://schemas.microsoft.com/office/powerpoint/2010/main" val="1211738839"/>
       </p:ext>
     </p:extLst>
   </p:cSld>
@@ -10117,7 +10423,7 @@
           <p:cNvPr id="16" name="">
             <a:extLst xmlns:a="http://schemas.openxmlformats.org/drawingml/2006/main">
               <a:ext uri="{FF2B5EF4-FFF2-40B4-BE49-F238E27FC236}">
-                <a16:creationId xmlns:a16="http://schemas.microsoft.com/office/drawing/2014/main" id="{103E92D1-4875-47A5-BDA5-75424E87067E}"/>
+                <a16:creationId xmlns:a16="http://schemas.microsoft.com/office/drawing/2014/main" id="{C06F5323-6EE9-4FAC-9921-C6E4707E2BFC}"/>
               </a:ext>
             </a:extLst>
           </p:cNvPr>
@@ -10149,7 +10455,7 @@
           <p:cNvPr id="2" name="">
             <a:extLst xmlns:a="http://schemas.openxmlformats.org/drawingml/2006/main">
               <a:ext uri="{FF2B5EF4-FFF2-40B4-BE49-F238E27FC236}">
-                <a16:creationId xmlns:a16="http://schemas.microsoft.com/office/drawing/2014/main" id="{F1F528B2-06A3-4B30-A670-D762AD681317}"/>
+                <a16:creationId xmlns:a16="http://schemas.microsoft.com/office/drawing/2014/main" id="{95BAF576-BDCE-494B-8ED5-BF53ED4923FC}"/>
               </a:ext>
             </a:extLst>
           </p:cNvPr>
@@ -10206,7 +10512,7 @@
           <p:cNvPr id="3" name="">
             <a:extLst xmlns:a="http://schemas.openxmlformats.org/drawingml/2006/main">
               <a:ext uri="{FF2B5EF4-FFF2-40B4-BE49-F238E27FC236}">
-                <a16:creationId xmlns:a16="http://schemas.microsoft.com/office/drawing/2014/main" id="{A7EA344F-B153-4A2F-82F9-FCA9024D8952}"/>
+                <a16:creationId xmlns:a16="http://schemas.microsoft.com/office/drawing/2014/main" id="{C5206ED5-BAF6-46BB-B80D-08B774DC5730}"/>
               </a:ext>
             </a:extLst>
           </p:cNvPr>
@@ -10238,7 +10544,7 @@
           <p:cNvPr id="4" name="">
             <a:extLst xmlns:a="http://schemas.openxmlformats.org/drawingml/2006/main">
               <a:ext uri="{FF2B5EF4-FFF2-40B4-BE49-F238E27FC236}">
-                <a16:creationId xmlns:a16="http://schemas.microsoft.com/office/drawing/2014/main" id="{97C5F7E3-1552-41D1-833E-A1EAE70D6DC3}"/>
+                <a16:creationId xmlns:a16="http://schemas.microsoft.com/office/drawing/2014/main" id="{918042D6-A78B-4C59-A2BA-FCCF2E900AC0}"/>
               </a:ext>
             </a:extLst>
           </p:cNvPr>
@@ -10295,7 +10601,7 @@
           <p:cNvPr id="5" name="">
             <a:extLst xmlns:a="http://schemas.openxmlformats.org/drawingml/2006/main">
               <a:ext uri="{FF2B5EF4-FFF2-40B4-BE49-F238E27FC236}">
-                <a16:creationId xmlns:a16="http://schemas.microsoft.com/office/drawing/2014/main" id="{2BEE91F3-3571-498D-A20B-0A900A559AC7}"/>
+                <a16:creationId xmlns:a16="http://schemas.microsoft.com/office/drawing/2014/main" id="{BA4AAFD0-852E-480C-8D6F-5672BCAB852B}"/>
               </a:ext>
             </a:extLst>
           </p:cNvPr>
@@ -10352,7 +10658,7 @@
           <p:cNvPr id="6" name="">
             <a:extLst xmlns:a="http://schemas.openxmlformats.org/drawingml/2006/main">
               <a:ext uri="{FF2B5EF4-FFF2-40B4-BE49-F238E27FC236}">
-                <a16:creationId xmlns:a16="http://schemas.microsoft.com/office/drawing/2014/main" id="{B3AC4840-7577-4534-B18D-94D7B9D86272}"/>
+                <a16:creationId xmlns:a16="http://schemas.microsoft.com/office/drawing/2014/main" id="{CE620EEF-2516-466B-B60A-518DFE36C5D3}"/>
               </a:ext>
             </a:extLst>
           </p:cNvPr>
@@ -10409,7 +10715,7 @@
           <p:cNvPr id="7" name="">
             <a:extLst xmlns:a="http://schemas.openxmlformats.org/drawingml/2006/main">
               <a:ext uri="{FF2B5EF4-FFF2-40B4-BE49-F238E27FC236}">
-                <a16:creationId xmlns:a16="http://schemas.microsoft.com/office/drawing/2014/main" id="{F5011963-BB9B-44AE-B929-A6C2CD814F40}"/>
+                <a16:creationId xmlns:a16="http://schemas.microsoft.com/office/drawing/2014/main" id="{FFB20F82-164E-46F6-9091-0987A5BFCDDE}"/>
               </a:ext>
             </a:extLst>
           </p:cNvPr>
@@ -10441,7 +10747,7 @@
           <p:cNvPr id="8" name="">
             <a:extLst xmlns:a="http://schemas.openxmlformats.org/drawingml/2006/main">
               <a:ext uri="{FF2B5EF4-FFF2-40B4-BE49-F238E27FC236}">
-                <a16:creationId xmlns:a16="http://schemas.microsoft.com/office/drawing/2014/main" id="{3A7EF2BF-12C0-439C-A92A-8D786D3722C8}"/>
+                <a16:creationId xmlns:a16="http://schemas.microsoft.com/office/drawing/2014/main" id="{2F2DD458-7D9B-4725-9F8D-11440C5C8B30}"/>
               </a:ext>
             </a:extLst>
           </p:cNvPr>
@@ -10498,7 +10804,7 @@
           <p:cNvPr id="9" name="">
             <a:extLst xmlns:a="http://schemas.openxmlformats.org/drawingml/2006/main">
               <a:ext uri="{FF2B5EF4-FFF2-40B4-BE49-F238E27FC236}">
-                <a16:creationId xmlns:a16="http://schemas.microsoft.com/office/drawing/2014/main" id="{363E9134-3E38-4387-8FA8-43FFAA648610}"/>
+                <a16:creationId xmlns:a16="http://schemas.microsoft.com/office/drawing/2014/main" id="{3D6C0161-374B-47C8-A022-F5FFAF1A9EBE}"/>
               </a:ext>
             </a:extLst>
           </p:cNvPr>
@@ -10555,7 +10861,7 @@
           <p:cNvPr id="10" name="">
             <a:extLst xmlns:a="http://schemas.openxmlformats.org/drawingml/2006/main">
               <a:ext uri="{FF2B5EF4-FFF2-40B4-BE49-F238E27FC236}">
-                <a16:creationId xmlns:a16="http://schemas.microsoft.com/office/drawing/2014/main" id="{190BDFBB-675D-436A-9F9F-B769F91DF46A}"/>
+                <a16:creationId xmlns:a16="http://schemas.microsoft.com/office/drawing/2014/main" id="{415285A3-3A41-4102-A9C9-F2324AB7D5FA}"/>
               </a:ext>
             </a:extLst>
           </p:cNvPr>
@@ -10612,7 +10918,7 @@
           <p:cNvPr id="11" name="">
             <a:extLst xmlns:a="http://schemas.openxmlformats.org/drawingml/2006/main">
               <a:ext uri="{FF2B5EF4-FFF2-40B4-BE49-F238E27FC236}">
-                <a16:creationId xmlns:a16="http://schemas.microsoft.com/office/drawing/2014/main" id="{40922E99-3513-46CB-A16D-A6073030DAB5}"/>
+                <a16:creationId xmlns:a16="http://schemas.microsoft.com/office/drawing/2014/main" id="{FFB59F49-AE4D-4916-90C3-CDA818032F73}"/>
               </a:ext>
             </a:extLst>
           </p:cNvPr>
@@ -10669,7 +10975,7 @@
           <p:cNvPr id="12" name="">
             <a:extLst xmlns:a="http://schemas.openxmlformats.org/drawingml/2006/main">
               <a:ext uri="{FF2B5EF4-FFF2-40B4-BE49-F238E27FC236}">
-                <a16:creationId xmlns:a16="http://schemas.microsoft.com/office/drawing/2014/main" id="{30822373-03AF-4074-8F71-2E6054AC2A66}"/>
+                <a16:creationId xmlns:a16="http://schemas.microsoft.com/office/drawing/2014/main" id="{4DC3A12F-343A-4E8C-81AE-EBF0A68AEE90}"/>
               </a:ext>
             </a:extLst>
           </p:cNvPr>
@@ -10726,7 +11032,7 @@
           <p:cNvPr id="13" name="">
             <a:extLst xmlns:a="http://schemas.openxmlformats.org/drawingml/2006/main">
               <a:ext uri="{FF2B5EF4-FFF2-40B4-BE49-F238E27FC236}">
-                <a16:creationId xmlns:a16="http://schemas.microsoft.com/office/drawing/2014/main" id="{8FAE37A8-3796-4D7F-8774-F3257591281A}"/>
+                <a16:creationId xmlns:a16="http://schemas.microsoft.com/office/drawing/2014/main" id="{B70E0217-99B2-4EE0-9054-B3B322F6B843}"/>
               </a:ext>
             </a:extLst>
           </p:cNvPr>
@@ -10783,7 +11089,7 @@
           <p:cNvPr id="14" name="">
             <a:extLst xmlns:a="http://schemas.openxmlformats.org/drawingml/2006/main">
               <a:ext uri="{FF2B5EF4-FFF2-40B4-BE49-F238E27FC236}">
-                <a16:creationId xmlns:a16="http://schemas.microsoft.com/office/drawing/2014/main" id="{8D6F68AB-1E70-4572-ACAE-3EEF20D1EBAC}"/>
+                <a16:creationId xmlns:a16="http://schemas.microsoft.com/office/drawing/2014/main" id="{D9F8EA7F-2168-4F34-B3CA-73CEE8CDF10B}"/>
               </a:ext>
             </a:extLst>
           </p:cNvPr>
@@ -10840,7 +11146,7 @@
           <p:cNvPr id="15" name="">
             <a:extLst xmlns:a="http://schemas.openxmlformats.org/drawingml/2006/main">
               <a:ext uri="{FF2B5EF4-FFF2-40B4-BE49-F238E27FC236}">
-                <a16:creationId xmlns:a16="http://schemas.microsoft.com/office/drawing/2014/main" id="{475E1C96-51C0-4D46-82B0-7C7652FCCBCA}"/>
+                <a16:creationId xmlns:a16="http://schemas.microsoft.com/office/drawing/2014/main" id="{4EA6DAE6-ECA9-44FF-B017-643DD5BFE108}"/>
               </a:ext>
             </a:extLst>
           </p:cNvPr>
@@ -10895,7 +11201,7 @@
     </p:spTree>
     <p:extLst>
       <p:ext uri="{BB962C8B-B14F-4D97-AF65-F5344CB8AC3E}">
-        <p14:creationId xmlns:p14="http://schemas.microsoft.com/office/powerpoint/2010/main" val="1541821124"/>
+        <p14:creationId xmlns:p14="http://schemas.microsoft.com/office/powerpoint/2010/main" val="152321904"/>
       </p:ext>
     </p:extLst>
   </p:cSld>
@@ -11050,7 +11356,7 @@
           <p:cNvPr id="16" name="">
             <a:extLst xmlns:a="http://schemas.openxmlformats.org/drawingml/2006/main">
               <a:ext uri="{FF2B5EF4-FFF2-40B4-BE49-F238E27FC236}">
-                <a16:creationId xmlns:a16="http://schemas.microsoft.com/office/drawing/2014/main" id="{7CEFDDF9-E13D-4705-99FB-397F2731AF9C}"/>
+                <a16:creationId xmlns:a16="http://schemas.microsoft.com/office/drawing/2014/main" id="{4F06073C-2C50-4115-8A90-8DC120197306}"/>
               </a:ext>
             </a:extLst>
           </p:cNvPr>
@@ -11082,7 +11388,7 @@
           <p:cNvPr id="2" name="">
             <a:extLst xmlns:a="http://schemas.openxmlformats.org/drawingml/2006/main">
               <a:ext uri="{FF2B5EF4-FFF2-40B4-BE49-F238E27FC236}">
-                <a16:creationId xmlns:a16="http://schemas.microsoft.com/office/drawing/2014/main" id="{EDB93FF0-A339-4209-A2BA-9EC1D4CBA95E}"/>
+                <a16:creationId xmlns:a16="http://schemas.microsoft.com/office/drawing/2014/main" id="{2080117E-82D3-4608-BD84-996A4C9035BA}"/>
               </a:ext>
             </a:extLst>
           </p:cNvPr>
@@ -11139,7 +11445,7 @@
           <p:cNvPr id="3" name="">
             <a:extLst xmlns:a="http://schemas.openxmlformats.org/drawingml/2006/main">
               <a:ext uri="{FF2B5EF4-FFF2-40B4-BE49-F238E27FC236}">
-                <a16:creationId xmlns:a16="http://schemas.microsoft.com/office/drawing/2014/main" id="{C64222D2-DB6A-454D-A392-948CE22A445C}"/>
+                <a16:creationId xmlns:a16="http://schemas.microsoft.com/office/drawing/2014/main" id="{9637145C-A6BF-494E-920F-BEE62F5084ED}"/>
               </a:ext>
             </a:extLst>
           </p:cNvPr>
@@ -11171,7 +11477,7 @@
           <p:cNvPr id="4" name="">
             <a:extLst xmlns:a="http://schemas.openxmlformats.org/drawingml/2006/main">
               <a:ext uri="{FF2B5EF4-FFF2-40B4-BE49-F238E27FC236}">
-                <a16:creationId xmlns:a16="http://schemas.microsoft.com/office/drawing/2014/main" id="{C3B5EABB-6E55-4632-9DF3-866491BB3163}"/>
+                <a16:creationId xmlns:a16="http://schemas.microsoft.com/office/drawing/2014/main" id="{84583D25-109D-4102-8B6B-20A885E6571E}"/>
               </a:ext>
             </a:extLst>
           </p:cNvPr>
@@ -11228,7 +11534,7 @@
           <p:cNvPr id="5" name="">
             <a:extLst xmlns:a="http://schemas.openxmlformats.org/drawingml/2006/main">
               <a:ext uri="{FF2B5EF4-FFF2-40B4-BE49-F238E27FC236}">
-                <a16:creationId xmlns:a16="http://schemas.microsoft.com/office/drawing/2014/main" id="{A7C15036-6576-43BB-B09F-2A82B3A6847C}"/>
+                <a16:creationId xmlns:a16="http://schemas.microsoft.com/office/drawing/2014/main" id="{EB22F0B9-E21D-420F-A82B-C68318C9AE19}"/>
               </a:ext>
             </a:extLst>
           </p:cNvPr>
@@ -11285,7 +11591,7 @@
           <p:cNvPr id="6" name="">
             <a:extLst xmlns:a="http://schemas.openxmlformats.org/drawingml/2006/main">
               <a:ext uri="{FF2B5EF4-FFF2-40B4-BE49-F238E27FC236}">
-                <a16:creationId xmlns:a16="http://schemas.microsoft.com/office/drawing/2014/main" id="{038A0266-AB71-4A5E-8BDE-097B514B2B46}"/>
+                <a16:creationId xmlns:a16="http://schemas.microsoft.com/office/drawing/2014/main" id="{099AD771-D6B8-4661-BE06-AF3FCCF5544D}"/>
               </a:ext>
             </a:extLst>
           </p:cNvPr>
@@ -11342,7 +11648,7 @@
           <p:cNvPr id="7" name="">
             <a:extLst xmlns:a="http://schemas.openxmlformats.org/drawingml/2006/main">
               <a:ext uri="{FF2B5EF4-FFF2-40B4-BE49-F238E27FC236}">
-                <a16:creationId xmlns:a16="http://schemas.microsoft.com/office/drawing/2014/main" id="{42D2BB1D-F688-4563-B205-567515B2D20B}"/>
+                <a16:creationId xmlns:a16="http://schemas.microsoft.com/office/drawing/2014/main" id="{0B9E0495-305C-4C6E-9D7B-B9506EEC9781}"/>
               </a:ext>
             </a:extLst>
           </p:cNvPr>
@@ -11374,7 +11680,7 @@
           <p:cNvPr id="8" name="">
             <a:extLst xmlns:a="http://schemas.openxmlformats.org/drawingml/2006/main">
               <a:ext uri="{FF2B5EF4-FFF2-40B4-BE49-F238E27FC236}">
-                <a16:creationId xmlns:a16="http://schemas.microsoft.com/office/drawing/2014/main" id="{7EA83FB7-CC58-4308-873B-C95870D46674}"/>
+                <a16:creationId xmlns:a16="http://schemas.microsoft.com/office/drawing/2014/main" id="{039375E1-6C7C-4774-A2FA-E4DDB228004B}"/>
               </a:ext>
             </a:extLst>
           </p:cNvPr>
@@ -11431,7 +11737,7 @@
           <p:cNvPr id="9" name="">
             <a:extLst xmlns:a="http://schemas.openxmlformats.org/drawingml/2006/main">
               <a:ext uri="{FF2B5EF4-FFF2-40B4-BE49-F238E27FC236}">
-                <a16:creationId xmlns:a16="http://schemas.microsoft.com/office/drawing/2014/main" id="{7AFB1172-5A8F-4914-A4BC-3B2D8CD0A67A}"/>
+                <a16:creationId xmlns:a16="http://schemas.microsoft.com/office/drawing/2014/main" id="{34612627-14B4-4243-82DA-9C521DE35943}"/>
               </a:ext>
             </a:extLst>
           </p:cNvPr>
@@ -11492,7 +11798,7 @@
           <p:nvPr/>
         </p:nvPicPr>
         <p:blipFill>
-          <a:blip xmlns:r="http://schemas.openxmlformats.org/officeDocument/2006/relationships" xmlns:a="http://schemas.openxmlformats.org/drawingml/2006/main" r:embed="Rfda05882f19d4c5d"/>
+          <a:blip xmlns:r="http://schemas.openxmlformats.org/officeDocument/2006/relationships" xmlns:a="http://schemas.openxmlformats.org/drawingml/2006/main" r:embed="R82c8ee584e9f40e8"/>
           <a:stretch xmlns:a="http://schemas.openxmlformats.org/drawingml/2006/main"/>
         </p:blipFill>
         <p:spPr>
@@ -11510,7 +11816,7 @@
           <p:cNvPr id="11" name="">
             <a:extLst xmlns:a="http://schemas.openxmlformats.org/drawingml/2006/main">
               <a:ext uri="{FF2B5EF4-FFF2-40B4-BE49-F238E27FC236}">
-                <a16:creationId xmlns:a16="http://schemas.microsoft.com/office/drawing/2014/main" id="{372B0A36-8FBC-4E7C-9A66-E3EC5375482F}"/>
+                <a16:creationId xmlns:a16="http://schemas.microsoft.com/office/drawing/2014/main" id="{D771E850-395B-4C11-80C4-AC69F48D748E}"/>
               </a:ext>
             </a:extLst>
           </p:cNvPr>
@@ -11567,7 +11873,7 @@
           <p:cNvPr id="12" name="">
             <a:extLst xmlns:a="http://schemas.openxmlformats.org/drawingml/2006/main">
               <a:ext uri="{FF2B5EF4-FFF2-40B4-BE49-F238E27FC236}">
-                <a16:creationId xmlns:a16="http://schemas.microsoft.com/office/drawing/2014/main" id="{39CA39BE-F753-434C-93FD-037146623D74}"/>
+                <a16:creationId xmlns:a16="http://schemas.microsoft.com/office/drawing/2014/main" id="{35D3598E-E561-47DC-80D0-71AC25FB40B5}"/>
               </a:ext>
             </a:extLst>
           </p:cNvPr>
@@ -11624,7 +11930,7 @@
           <p:cNvPr id="13" name="">
             <a:extLst xmlns:a="http://schemas.openxmlformats.org/drawingml/2006/main">
               <a:ext uri="{FF2B5EF4-FFF2-40B4-BE49-F238E27FC236}">
-                <a16:creationId xmlns:a16="http://schemas.microsoft.com/office/drawing/2014/main" id="{3192F899-E2D2-4708-AC84-E50CB2DAB105}"/>
+                <a16:creationId xmlns:a16="http://schemas.microsoft.com/office/drawing/2014/main" id="{707AA2EC-4418-4778-B8CE-59B916B87AAB}"/>
               </a:ext>
             </a:extLst>
           </p:cNvPr>
@@ -11656,7 +11962,7 @@
           <p:cNvPr id="14" name="">
             <a:extLst xmlns:a="http://schemas.openxmlformats.org/drawingml/2006/main">
               <a:ext uri="{FF2B5EF4-FFF2-40B4-BE49-F238E27FC236}">
-                <a16:creationId xmlns:a16="http://schemas.microsoft.com/office/drawing/2014/main" id="{DA129AEE-A222-4051-8B63-50B37AB04FD7}"/>
+                <a16:creationId xmlns:a16="http://schemas.microsoft.com/office/drawing/2014/main" id="{C67EF469-0637-406D-8DA3-CFCA23C0A0CF}"/>
               </a:ext>
             </a:extLst>
           </p:cNvPr>
@@ -11713,7 +12019,7 @@
           <p:cNvPr id="15" name="">
             <a:extLst xmlns:a="http://schemas.openxmlformats.org/drawingml/2006/main">
               <a:ext uri="{FF2B5EF4-FFF2-40B4-BE49-F238E27FC236}">
-                <a16:creationId xmlns:a16="http://schemas.microsoft.com/office/drawing/2014/main" id="{E0C41360-5757-4480-B0E3-8A9D3691C2CE}"/>
+                <a16:creationId xmlns:a16="http://schemas.microsoft.com/office/drawing/2014/main" id="{093530E9-B80B-4CF0-B548-43A57E028B7A}"/>
               </a:ext>
             </a:extLst>
           </p:cNvPr>
@@ -11768,7 +12074,7 @@
     </p:spTree>
     <p:extLst>
       <p:ext uri="{BB962C8B-B14F-4D97-AF65-F5344CB8AC3E}">
-        <p14:creationId xmlns:p14="http://schemas.microsoft.com/office/powerpoint/2010/main" val="882541076"/>
+        <p14:creationId xmlns:p14="http://schemas.microsoft.com/office/powerpoint/2010/main" val="1733205579"/>
       </p:ext>
     </p:extLst>
   </p:cSld>
@@ -11923,7 +12229,7 @@
           <p:cNvPr id="23" name="">
             <a:extLst xmlns:a="http://schemas.openxmlformats.org/drawingml/2006/main">
               <a:ext uri="{FF2B5EF4-FFF2-40B4-BE49-F238E27FC236}">
-                <a16:creationId xmlns:a16="http://schemas.microsoft.com/office/drawing/2014/main" id="{3B321A28-506B-441A-8556-1F245C06CC8A}"/>
+                <a16:creationId xmlns:a16="http://schemas.microsoft.com/office/drawing/2014/main" id="{4413DB71-9154-40B2-9BC3-1BB6B4E3D69A}"/>
               </a:ext>
             </a:extLst>
           </p:cNvPr>
@@ -11955,7 +12261,7 @@
           <p:cNvPr id="2" name="">
             <a:extLst xmlns:a="http://schemas.openxmlformats.org/drawingml/2006/main">
               <a:ext uri="{FF2B5EF4-FFF2-40B4-BE49-F238E27FC236}">
-                <a16:creationId xmlns:a16="http://schemas.microsoft.com/office/drawing/2014/main" id="{4090BF1B-1966-4DA5-A6BA-E447FC40073F}"/>
+                <a16:creationId xmlns:a16="http://schemas.microsoft.com/office/drawing/2014/main" id="{69708718-A478-47D7-AC91-9E1A3BDD5161}"/>
               </a:ext>
             </a:extLst>
           </p:cNvPr>
@@ -12012,7 +12318,7 @@
           <p:cNvPr id="3" name="">
             <a:extLst xmlns:a="http://schemas.openxmlformats.org/drawingml/2006/main">
               <a:ext uri="{FF2B5EF4-FFF2-40B4-BE49-F238E27FC236}">
-                <a16:creationId xmlns:a16="http://schemas.microsoft.com/office/drawing/2014/main" id="{E2E3E81B-BC88-4BE4-A885-71D7251009E4}"/>
+                <a16:creationId xmlns:a16="http://schemas.microsoft.com/office/drawing/2014/main" id="{04ECD248-0174-4BB5-A904-B2CFFEAFC919}"/>
               </a:ext>
             </a:extLst>
           </p:cNvPr>
@@ -12044,7 +12350,7 @@
           <p:cNvPr id="4" name="">
             <a:extLst xmlns:a="http://schemas.openxmlformats.org/drawingml/2006/main">
               <a:ext uri="{FF2B5EF4-FFF2-40B4-BE49-F238E27FC236}">
-                <a16:creationId xmlns:a16="http://schemas.microsoft.com/office/drawing/2014/main" id="{B6F65A37-37CB-434F-A4FF-D089188ABCBE}"/>
+                <a16:creationId xmlns:a16="http://schemas.microsoft.com/office/drawing/2014/main" id="{37C6B662-1E43-4F22-ABCC-F23AD8D24AAB}"/>
               </a:ext>
             </a:extLst>
           </p:cNvPr>
@@ -12101,7 +12407,7 @@
           <p:cNvPr id="5" name="">
             <a:extLst xmlns:a="http://schemas.openxmlformats.org/drawingml/2006/main">
               <a:ext uri="{FF2B5EF4-FFF2-40B4-BE49-F238E27FC236}">
-                <a16:creationId xmlns:a16="http://schemas.microsoft.com/office/drawing/2014/main" id="{8F62368E-B69E-4402-8404-619B2E2E7D47}"/>
+                <a16:creationId xmlns:a16="http://schemas.microsoft.com/office/drawing/2014/main" id="{0B7B0148-52ED-452B-866B-E42C87E922FE}"/>
               </a:ext>
             </a:extLst>
           </p:cNvPr>
@@ -12158,7 +12464,7 @@
           <p:cNvPr id="6" name="">
             <a:extLst xmlns:a="http://schemas.openxmlformats.org/drawingml/2006/main">
               <a:ext uri="{FF2B5EF4-FFF2-40B4-BE49-F238E27FC236}">
-                <a16:creationId xmlns:a16="http://schemas.microsoft.com/office/drawing/2014/main" id="{84825FCF-5BD1-4B23-8568-7D25F472B32B}"/>
+                <a16:creationId xmlns:a16="http://schemas.microsoft.com/office/drawing/2014/main" id="{43B0E0F9-A2F3-4823-B175-5D1A6068FD5B}"/>
               </a:ext>
             </a:extLst>
           </p:cNvPr>
@@ -12215,7 +12521,7 @@
           <p:cNvPr id="7" name="">
             <a:extLst xmlns:a="http://schemas.openxmlformats.org/drawingml/2006/main">
               <a:ext uri="{FF2B5EF4-FFF2-40B4-BE49-F238E27FC236}">
-                <a16:creationId xmlns:a16="http://schemas.microsoft.com/office/drawing/2014/main" id="{360C64C4-8F1B-4741-9B8F-D81A324B2684}"/>
+                <a16:creationId xmlns:a16="http://schemas.microsoft.com/office/drawing/2014/main" id="{A1BC0787-0C85-4130-B23C-2C9D3F510C2E}"/>
               </a:ext>
             </a:extLst>
           </p:cNvPr>
@@ -12247,7 +12553,7 @@
           <p:cNvPr id="8" name="">
             <a:extLst xmlns:a="http://schemas.openxmlformats.org/drawingml/2006/main">
               <a:ext uri="{FF2B5EF4-FFF2-40B4-BE49-F238E27FC236}">
-                <a16:creationId xmlns:a16="http://schemas.microsoft.com/office/drawing/2014/main" id="{77559207-61CD-4C69-B220-E515C472D32A}"/>
+                <a16:creationId xmlns:a16="http://schemas.microsoft.com/office/drawing/2014/main" id="{138A6172-0BEE-461E-AA0D-3FC97FE729D3}"/>
               </a:ext>
             </a:extLst>
           </p:cNvPr>
@@ -12304,7 +12610,7 @@
           <p:cNvPr id="9" name="">
             <a:extLst xmlns:a="http://schemas.openxmlformats.org/drawingml/2006/main">
               <a:ext uri="{FF2B5EF4-FFF2-40B4-BE49-F238E27FC236}">
-                <a16:creationId xmlns:a16="http://schemas.microsoft.com/office/drawing/2014/main" id="{C406E65B-8B15-4202-93BC-90396CF6E0C6}"/>
+                <a16:creationId xmlns:a16="http://schemas.microsoft.com/office/drawing/2014/main" id="{07456898-77B7-4974-9FDA-2EE1F5D50027}"/>
               </a:ext>
             </a:extLst>
           </p:cNvPr>
@@ -12361,7 +12667,7 @@
           <p:cNvPr id="10" name="">
             <a:extLst xmlns:a="http://schemas.openxmlformats.org/drawingml/2006/main">
               <a:ext uri="{FF2B5EF4-FFF2-40B4-BE49-F238E27FC236}">
-                <a16:creationId xmlns:a16="http://schemas.microsoft.com/office/drawing/2014/main" id="{16E3D2F5-B914-46AB-B274-7999DF0AE08D}"/>
+                <a16:creationId xmlns:a16="http://schemas.microsoft.com/office/drawing/2014/main" id="{0D0597D4-C869-48A7-B311-A2CB40FEE849}"/>
               </a:ext>
             </a:extLst>
           </p:cNvPr>
@@ -12395,7 +12701,7 @@
           <p:cNvPr id="11" name="">
             <a:extLst xmlns:a="http://schemas.openxmlformats.org/drawingml/2006/main">
               <a:ext uri="{FF2B5EF4-FFF2-40B4-BE49-F238E27FC236}">
-                <a16:creationId xmlns:a16="http://schemas.microsoft.com/office/drawing/2014/main" id="{26EE5367-0518-4A2E-A0A9-D6636C71EE84}"/>
+                <a16:creationId xmlns:a16="http://schemas.microsoft.com/office/drawing/2014/main" id="{DF5A50EB-3ABD-4191-9C8B-83A28DE0CC75}"/>
               </a:ext>
             </a:extLst>
           </p:cNvPr>
@@ -12427,7 +12733,7 @@
           <p:cNvPr id="12" name="">
             <a:extLst xmlns:a="http://schemas.openxmlformats.org/drawingml/2006/main">
               <a:ext uri="{FF2B5EF4-FFF2-40B4-BE49-F238E27FC236}">
-                <a16:creationId xmlns:a16="http://schemas.microsoft.com/office/drawing/2014/main" id="{AB5FE91D-3E3C-4A7F-8BE6-D22EC8C560C6}"/>
+                <a16:creationId xmlns:a16="http://schemas.microsoft.com/office/drawing/2014/main" id="{07ACE2E5-8384-4963-AB33-BF54A26AFD67}"/>
               </a:ext>
             </a:extLst>
           </p:cNvPr>
@@ -12484,7 +12790,7 @@
           <p:cNvPr id="13" name="">
             <a:extLst xmlns:a="http://schemas.openxmlformats.org/drawingml/2006/main">
               <a:ext uri="{FF2B5EF4-FFF2-40B4-BE49-F238E27FC236}">
-                <a16:creationId xmlns:a16="http://schemas.microsoft.com/office/drawing/2014/main" id="{E1B2B44D-9E29-4009-8E01-8D87F360EE98}"/>
+                <a16:creationId xmlns:a16="http://schemas.microsoft.com/office/drawing/2014/main" id="{A41CB59E-0453-4B9E-BA66-B03B339FFAEF}"/>
               </a:ext>
             </a:extLst>
           </p:cNvPr>
@@ -12541,7 +12847,7 @@
           <p:cNvPr id="14" name="">
             <a:extLst xmlns:a="http://schemas.openxmlformats.org/drawingml/2006/main">
               <a:ext uri="{FF2B5EF4-FFF2-40B4-BE49-F238E27FC236}">
-                <a16:creationId xmlns:a16="http://schemas.microsoft.com/office/drawing/2014/main" id="{867BAE6F-E68D-4685-945B-54B23FAFD2D0}"/>
+                <a16:creationId xmlns:a16="http://schemas.microsoft.com/office/drawing/2014/main" id="{12895B95-F4B8-4DD1-B08A-160B367A0529}"/>
               </a:ext>
             </a:extLst>
           </p:cNvPr>
@@ -12575,7 +12881,7 @@
           <p:cNvPr id="15" name="">
             <a:extLst xmlns:a="http://schemas.openxmlformats.org/drawingml/2006/main">
               <a:ext uri="{FF2B5EF4-FFF2-40B4-BE49-F238E27FC236}">
-                <a16:creationId xmlns:a16="http://schemas.microsoft.com/office/drawing/2014/main" id="{0D90E842-04F2-4BC2-B31A-E0BA724D5410}"/>
+                <a16:creationId xmlns:a16="http://schemas.microsoft.com/office/drawing/2014/main" id="{206C0AB6-0D0D-4E77-A983-94AE741F14DE}"/>
               </a:ext>
             </a:extLst>
           </p:cNvPr>
@@ -12607,7 +12913,7 @@
           <p:cNvPr id="16" name="">
             <a:extLst xmlns:a="http://schemas.openxmlformats.org/drawingml/2006/main">
               <a:ext uri="{FF2B5EF4-FFF2-40B4-BE49-F238E27FC236}">
-                <a16:creationId xmlns:a16="http://schemas.microsoft.com/office/drawing/2014/main" id="{EBA9D0BE-EB41-4B0D-8B9D-C21DE9AACC57}"/>
+                <a16:creationId xmlns:a16="http://schemas.microsoft.com/office/drawing/2014/main" id="{11F8B3FB-7B29-4460-8B46-3F8A3138B634}"/>
               </a:ext>
             </a:extLst>
           </p:cNvPr>
@@ -12664,7 +12970,7 @@
           <p:cNvPr id="17" name="">
             <a:extLst xmlns:a="http://schemas.openxmlformats.org/drawingml/2006/main">
               <a:ext uri="{FF2B5EF4-FFF2-40B4-BE49-F238E27FC236}">
-                <a16:creationId xmlns:a16="http://schemas.microsoft.com/office/drawing/2014/main" id="{3C1B8ED5-11B4-4A45-B815-68172FB71C63}"/>
+                <a16:creationId xmlns:a16="http://schemas.microsoft.com/office/drawing/2014/main" id="{2C98A4FA-9A74-4011-A6BE-FBB2DA26D001}"/>
               </a:ext>
             </a:extLst>
           </p:cNvPr>
@@ -12721,7 +13027,7 @@
           <p:cNvPr id="18" name="">
             <a:extLst xmlns:a="http://schemas.openxmlformats.org/drawingml/2006/main">
               <a:ext uri="{FF2B5EF4-FFF2-40B4-BE49-F238E27FC236}">
-                <a16:creationId xmlns:a16="http://schemas.microsoft.com/office/drawing/2014/main" id="{0C4656BD-2634-489E-AF5A-443826D39B96}"/>
+                <a16:creationId xmlns:a16="http://schemas.microsoft.com/office/drawing/2014/main" id="{98BC0C6A-7109-4A57-8FFA-30D4EB2881BB}"/>
               </a:ext>
             </a:extLst>
           </p:cNvPr>
@@ -12755,7 +13061,7 @@
           <p:cNvPr id="19" name="">
             <a:extLst xmlns:a="http://schemas.openxmlformats.org/drawingml/2006/main">
               <a:ext uri="{FF2B5EF4-FFF2-40B4-BE49-F238E27FC236}">
-                <a16:creationId xmlns:a16="http://schemas.microsoft.com/office/drawing/2014/main" id="{D407739B-173F-4E0E-B6B1-B01C75452AD9}"/>
+                <a16:creationId xmlns:a16="http://schemas.microsoft.com/office/drawing/2014/main" id="{9E3E2272-FED4-4CA5-BB65-61B037AB226B}"/>
               </a:ext>
             </a:extLst>
           </p:cNvPr>
@@ -12787,7 +13093,7 @@
           <p:cNvPr id="20" name="">
             <a:extLst xmlns:a="http://schemas.openxmlformats.org/drawingml/2006/main">
               <a:ext uri="{FF2B5EF4-FFF2-40B4-BE49-F238E27FC236}">
-                <a16:creationId xmlns:a16="http://schemas.microsoft.com/office/drawing/2014/main" id="{4E0B5A85-EDD5-4A72-AA06-11FA9074D424}"/>
+                <a16:creationId xmlns:a16="http://schemas.microsoft.com/office/drawing/2014/main" id="{3CAFE0B8-3E42-4692-BC01-F9B66857AD93}"/>
               </a:ext>
             </a:extLst>
           </p:cNvPr>
@@ -12844,7 +13150,7 @@
           <p:cNvPr id="21" name="">
             <a:extLst xmlns:a="http://schemas.openxmlformats.org/drawingml/2006/main">
               <a:ext uri="{FF2B5EF4-FFF2-40B4-BE49-F238E27FC236}">
-                <a16:creationId xmlns:a16="http://schemas.microsoft.com/office/drawing/2014/main" id="{E0866086-2F20-4788-8B97-65A024588C3A}"/>
+                <a16:creationId xmlns:a16="http://schemas.microsoft.com/office/drawing/2014/main" id="{FE4B203E-AE06-4123-BE65-08523B58827C}"/>
               </a:ext>
             </a:extLst>
           </p:cNvPr>
@@ -12901,7 +13207,7 @@
           <p:cNvPr id="22" name="">
             <a:extLst xmlns:a="http://schemas.openxmlformats.org/drawingml/2006/main">
               <a:ext uri="{FF2B5EF4-FFF2-40B4-BE49-F238E27FC236}">
-                <a16:creationId xmlns:a16="http://schemas.microsoft.com/office/drawing/2014/main" id="{C8133C3B-1E91-47AD-8AE1-6DD9432E848B}"/>
+                <a16:creationId xmlns:a16="http://schemas.microsoft.com/office/drawing/2014/main" id="{AE183EC9-D11F-4EDC-982F-E5DEF0AD67B0}"/>
               </a:ext>
             </a:extLst>
           </p:cNvPr>
@@ -12956,7 +13262,7 @@
     </p:spTree>
     <p:extLst>
       <p:ext uri="{BB962C8B-B14F-4D97-AF65-F5344CB8AC3E}">
-        <p14:creationId xmlns:p14="http://schemas.microsoft.com/office/powerpoint/2010/main" val="1149382999"/>
+        <p14:creationId xmlns:p14="http://schemas.microsoft.com/office/powerpoint/2010/main" val="698099343"/>
       </p:ext>
     </p:extLst>
   </p:cSld>
@@ -13157,7 +13463,7 @@
           <p:cNvPr id="22" name="">
             <a:extLst xmlns:a="http://schemas.openxmlformats.org/drawingml/2006/main">
               <a:ext uri="{FF2B5EF4-FFF2-40B4-BE49-F238E27FC236}">
-                <a16:creationId xmlns:a16="http://schemas.microsoft.com/office/drawing/2014/main" id="{6AE3D464-2913-48AB-AD39-A5AC8CADA2F7}"/>
+                <a16:creationId xmlns:a16="http://schemas.microsoft.com/office/drawing/2014/main" id="{D1EA1308-8FD7-4191-BE93-97DAE95E9439}"/>
               </a:ext>
             </a:extLst>
           </p:cNvPr>
@@ -13189,7 +13495,7 @@
           <p:cNvPr id="2" name="">
             <a:extLst xmlns:a="http://schemas.openxmlformats.org/drawingml/2006/main">
               <a:ext uri="{FF2B5EF4-FFF2-40B4-BE49-F238E27FC236}">
-                <a16:creationId xmlns:a16="http://schemas.microsoft.com/office/drawing/2014/main" id="{45DBDB11-7978-49B6-A29B-1C6D3B38AF7B}"/>
+                <a16:creationId xmlns:a16="http://schemas.microsoft.com/office/drawing/2014/main" id="{81E79D6C-4CFF-481B-B5C2-E5A221B35A73}"/>
               </a:ext>
             </a:extLst>
           </p:cNvPr>
@@ -13246,7 +13552,7 @@
           <p:cNvPr id="3" name="">
             <a:extLst xmlns:a="http://schemas.openxmlformats.org/drawingml/2006/main">
               <a:ext uri="{FF2B5EF4-FFF2-40B4-BE49-F238E27FC236}">
-                <a16:creationId xmlns:a16="http://schemas.microsoft.com/office/drawing/2014/main" id="{D55B3E4A-AE48-47F1-A523-EB1F71571B58}"/>
+                <a16:creationId xmlns:a16="http://schemas.microsoft.com/office/drawing/2014/main" id="{214646A3-25A9-4C07-AF20-BAF0DCD3DF00}"/>
               </a:ext>
             </a:extLst>
           </p:cNvPr>
@@ -13278,7 +13584,7 @@
           <p:cNvPr id="4" name="">
             <a:extLst xmlns:a="http://schemas.openxmlformats.org/drawingml/2006/main">
               <a:ext uri="{FF2B5EF4-FFF2-40B4-BE49-F238E27FC236}">
-                <a16:creationId xmlns:a16="http://schemas.microsoft.com/office/drawing/2014/main" id="{ED2AE2E0-4DDF-4517-9450-BD6AB37EFA8D}"/>
+                <a16:creationId xmlns:a16="http://schemas.microsoft.com/office/drawing/2014/main" id="{7BC397F2-6B4B-4CA0-A915-A0AF34A2A079}"/>
               </a:ext>
             </a:extLst>
           </p:cNvPr>
@@ -13335,7 +13641,7 @@
           <p:cNvPr id="5" name="">
             <a:extLst xmlns:a="http://schemas.openxmlformats.org/drawingml/2006/main">
               <a:ext uri="{FF2B5EF4-FFF2-40B4-BE49-F238E27FC236}">
-                <a16:creationId xmlns:a16="http://schemas.microsoft.com/office/drawing/2014/main" id="{7CD3361E-507F-4B53-8EB7-0CA58FEE0028}"/>
+                <a16:creationId xmlns:a16="http://schemas.microsoft.com/office/drawing/2014/main" id="{D8B5EAC3-756E-427B-9100-CFBA88269F94}"/>
               </a:ext>
             </a:extLst>
           </p:cNvPr>
@@ -13392,7 +13698,7 @@
           <p:cNvPr id="6" name="">
             <a:extLst xmlns:a="http://schemas.openxmlformats.org/drawingml/2006/main">
               <a:ext uri="{FF2B5EF4-FFF2-40B4-BE49-F238E27FC236}">
-                <a16:creationId xmlns:a16="http://schemas.microsoft.com/office/drawing/2014/main" id="{3BA1B963-3BF0-4F0B-AC6A-758CE27FAEFB}"/>
+                <a16:creationId xmlns:a16="http://schemas.microsoft.com/office/drawing/2014/main" id="{F8063C3B-1A05-4E78-AB54-EBE7CD2868A7}"/>
               </a:ext>
             </a:extLst>
           </p:cNvPr>
@@ -13449,7 +13755,7 @@
           <p:cNvPr id="7" name="">
             <a:extLst xmlns:a="http://schemas.openxmlformats.org/drawingml/2006/main">
               <a:ext uri="{FF2B5EF4-FFF2-40B4-BE49-F238E27FC236}">
-                <a16:creationId xmlns:a16="http://schemas.microsoft.com/office/drawing/2014/main" id="{8320417B-5E98-476F-8B12-6D7230D6A97B}"/>
+                <a16:creationId xmlns:a16="http://schemas.microsoft.com/office/drawing/2014/main" id="{C89FD7A1-76F7-443F-A56C-38D2C608BDDE}"/>
               </a:ext>
             </a:extLst>
           </p:cNvPr>
@@ -13481,7 +13787,7 @@
           <p:cNvPr id="8" name="">
             <a:extLst xmlns:a="http://schemas.openxmlformats.org/drawingml/2006/main">
               <a:ext uri="{FF2B5EF4-FFF2-40B4-BE49-F238E27FC236}">
-                <a16:creationId xmlns:a16="http://schemas.microsoft.com/office/drawing/2014/main" id="{CFD93A4E-1C67-4D11-853C-DE13BCAF97CD}"/>
+                <a16:creationId xmlns:a16="http://schemas.microsoft.com/office/drawing/2014/main" id="{69C79578-DE23-4D91-990A-29D614225B98}"/>
               </a:ext>
             </a:extLst>
           </p:cNvPr>
@@ -13538,7 +13844,7 @@
           <p:cNvPr id="9" name="">
             <a:extLst xmlns:a="http://schemas.openxmlformats.org/drawingml/2006/main">
               <a:ext uri="{FF2B5EF4-FFF2-40B4-BE49-F238E27FC236}">
-                <a16:creationId xmlns:a16="http://schemas.microsoft.com/office/drawing/2014/main" id="{CDE762B0-AF60-4EC4-BD0B-5ABB0C32DF69}"/>
+                <a16:creationId xmlns:a16="http://schemas.microsoft.com/office/drawing/2014/main" id="{47FB4E7E-657A-444A-9893-A89AA6FE3103}"/>
               </a:ext>
             </a:extLst>
           </p:cNvPr>
@@ -13595,7 +13901,7 @@
           <p:cNvPr id="10" name="">
             <a:extLst xmlns:a="http://schemas.openxmlformats.org/drawingml/2006/main">
               <a:ext uri="{FF2B5EF4-FFF2-40B4-BE49-F238E27FC236}">
-                <a16:creationId xmlns:a16="http://schemas.microsoft.com/office/drawing/2014/main" id="{08F5943B-71B0-4E9E-A778-9A6A5108C6F7}"/>
+                <a16:creationId xmlns:a16="http://schemas.microsoft.com/office/drawing/2014/main" id="{06C3B662-028D-47A3-B031-42BA87AAC5EF}"/>
               </a:ext>
             </a:extLst>
           </p:cNvPr>
@@ -13629,7 +13935,7 @@
           <p:cNvPr id="11" name="">
             <a:extLst xmlns:a="http://schemas.openxmlformats.org/drawingml/2006/main">
               <a:ext uri="{FF2B5EF4-FFF2-40B4-BE49-F238E27FC236}">
-                <a16:creationId xmlns:a16="http://schemas.microsoft.com/office/drawing/2014/main" id="{0652692D-8FF2-4C6C-8763-7866AEDB195E}"/>
+                <a16:creationId xmlns:a16="http://schemas.microsoft.com/office/drawing/2014/main" id="{50783101-2E33-4212-B257-E4E08F32F935}"/>
               </a:ext>
             </a:extLst>
           </p:cNvPr>
@@ -13661,7 +13967,7 @@
           <p:cNvPr id="12" name="">
             <a:extLst xmlns:a="http://schemas.openxmlformats.org/drawingml/2006/main">
               <a:ext uri="{FF2B5EF4-FFF2-40B4-BE49-F238E27FC236}">
-                <a16:creationId xmlns:a16="http://schemas.microsoft.com/office/drawing/2014/main" id="{549A5850-4FE9-4009-8B5C-53DA152FE856}"/>
+                <a16:creationId xmlns:a16="http://schemas.microsoft.com/office/drawing/2014/main" id="{03800EE1-A33F-432F-B65C-9071C2FDE84D}"/>
               </a:ext>
             </a:extLst>
           </p:cNvPr>
@@ -13718,7 +14024,7 @@
           <p:cNvPr id="13" name="">
             <a:extLst xmlns:a="http://schemas.openxmlformats.org/drawingml/2006/main">
               <a:ext uri="{FF2B5EF4-FFF2-40B4-BE49-F238E27FC236}">
-                <a16:creationId xmlns:a16="http://schemas.microsoft.com/office/drawing/2014/main" id="{C7FDB411-2EA3-4270-A1C1-1D00BDC3A1C8}"/>
+                <a16:creationId xmlns:a16="http://schemas.microsoft.com/office/drawing/2014/main" id="{02BF6751-FEDF-48B5-AA10-F3F8F6E72F56}"/>
               </a:ext>
             </a:extLst>
           </p:cNvPr>
@@ -13775,7 +14081,7 @@
           <p:cNvPr id="14" name="">
             <a:extLst xmlns:a="http://schemas.openxmlformats.org/drawingml/2006/main">
               <a:ext uri="{FF2B5EF4-FFF2-40B4-BE49-F238E27FC236}">
-                <a16:creationId xmlns:a16="http://schemas.microsoft.com/office/drawing/2014/main" id="{A0F410BE-36EC-4FF9-9E81-77874AE9EE63}"/>
+                <a16:creationId xmlns:a16="http://schemas.microsoft.com/office/drawing/2014/main" id="{41CACBC0-E8A6-40B1-AE41-86304FD0E19B}"/>
               </a:ext>
             </a:extLst>
           </p:cNvPr>
@@ -13809,7 +14115,7 @@
           <p:cNvPr id="15" name="">
             <a:extLst xmlns:a="http://schemas.openxmlformats.org/drawingml/2006/main">
               <a:ext uri="{FF2B5EF4-FFF2-40B4-BE49-F238E27FC236}">
-                <a16:creationId xmlns:a16="http://schemas.microsoft.com/office/drawing/2014/main" id="{3C4AE7CA-BFA1-41B2-A73D-F11671BD26BD}"/>
+                <a16:creationId xmlns:a16="http://schemas.microsoft.com/office/drawing/2014/main" id="{07A467A3-FD1A-48AE-AD1E-BE08ADDC2045}"/>
               </a:ext>
             </a:extLst>
           </p:cNvPr>
@@ -13841,7 +14147,7 @@
           <p:cNvPr id="16" name="">
             <a:extLst xmlns:a="http://schemas.openxmlformats.org/drawingml/2006/main">
               <a:ext uri="{FF2B5EF4-FFF2-40B4-BE49-F238E27FC236}">
-                <a16:creationId xmlns:a16="http://schemas.microsoft.com/office/drawing/2014/main" id="{F68CB4FF-0732-4FD0-94B7-B71E6A0C2E16}"/>
+                <a16:creationId xmlns:a16="http://schemas.microsoft.com/office/drawing/2014/main" id="{08A97E9D-1D39-4417-A1C4-C504C3F15F6E}"/>
               </a:ext>
             </a:extLst>
           </p:cNvPr>
@@ -13898,7 +14204,7 @@
           <p:cNvPr id="17" name="">
             <a:extLst xmlns:a="http://schemas.openxmlformats.org/drawingml/2006/main">
               <a:ext uri="{FF2B5EF4-FFF2-40B4-BE49-F238E27FC236}">
-                <a16:creationId xmlns:a16="http://schemas.microsoft.com/office/drawing/2014/main" id="{13E4997C-04DD-420D-B878-E04573EFE8BD}"/>
+                <a16:creationId xmlns:a16="http://schemas.microsoft.com/office/drawing/2014/main" id="{A2D205F3-0D8C-4ECC-BCE7-5820E2EE0CBB}"/>
               </a:ext>
             </a:extLst>
           </p:cNvPr>
@@ -13955,7 +14261,7 @@
           <p:cNvPr id="18" name="">
             <a:extLst xmlns:a="http://schemas.openxmlformats.org/drawingml/2006/main">
               <a:ext uri="{FF2B5EF4-FFF2-40B4-BE49-F238E27FC236}">
-                <a16:creationId xmlns:a16="http://schemas.microsoft.com/office/drawing/2014/main" id="{BB17C6A9-2FAE-4307-8E8B-EA2730687A03}"/>
+                <a16:creationId xmlns:a16="http://schemas.microsoft.com/office/drawing/2014/main" id="{DC0C6439-AC52-46B9-B1A6-A77AC76D5D10}"/>
               </a:ext>
             </a:extLst>
           </p:cNvPr>
@@ -13989,7 +14295,7 @@
           <p:cNvPr id="19" name="">
             <a:extLst xmlns:a="http://schemas.openxmlformats.org/drawingml/2006/main">
               <a:ext uri="{FF2B5EF4-FFF2-40B4-BE49-F238E27FC236}">
-                <a16:creationId xmlns:a16="http://schemas.microsoft.com/office/drawing/2014/main" id="{FDAE1FE9-78E8-4D6D-A252-AFCD73224A62}"/>
+                <a16:creationId xmlns:a16="http://schemas.microsoft.com/office/drawing/2014/main" id="{23ACC599-A9A8-4CD5-BE43-ED7CD294978B}"/>
               </a:ext>
             </a:extLst>
           </p:cNvPr>
@@ -14021,7 +14327,7 @@
           <p:cNvPr id="20" name="">
             <a:extLst xmlns:a="http://schemas.openxmlformats.org/drawingml/2006/main">
               <a:ext uri="{FF2B5EF4-FFF2-40B4-BE49-F238E27FC236}">
-                <a16:creationId xmlns:a16="http://schemas.microsoft.com/office/drawing/2014/main" id="{44FEAEA1-E4B9-4467-90B3-A6B95D52EEC7}"/>
+                <a16:creationId xmlns:a16="http://schemas.microsoft.com/office/drawing/2014/main" id="{77F2D916-072D-4CA2-BFC8-49A9B03E48D6}"/>
               </a:ext>
             </a:extLst>
           </p:cNvPr>
@@ -14078,7 +14384,7 @@
           <p:cNvPr id="21" name="">
             <a:extLst xmlns:a="http://schemas.openxmlformats.org/drawingml/2006/main">
               <a:ext uri="{FF2B5EF4-FFF2-40B4-BE49-F238E27FC236}">
-                <a16:creationId xmlns:a16="http://schemas.microsoft.com/office/drawing/2014/main" id="{9E9FC8D8-AC54-4C7A-9E25-42B3B83A4F13}"/>
+                <a16:creationId xmlns:a16="http://schemas.microsoft.com/office/drawing/2014/main" id="{F12BE0DB-4F26-460D-933D-3830160058DF}"/>
               </a:ext>
             </a:extLst>
           </p:cNvPr>
@@ -14133,7 +14439,7 @@
     </p:spTree>
     <p:extLst>
       <p:ext uri="{BB962C8B-B14F-4D97-AF65-F5344CB8AC3E}">
-        <p14:creationId xmlns:p14="http://schemas.microsoft.com/office/powerpoint/2010/main" val="543183264"/>
+        <p14:creationId xmlns:p14="http://schemas.microsoft.com/office/powerpoint/2010/main" val="108382353"/>
       </p:ext>
     </p:extLst>
   </p:cSld>
